--- a/SWARMOS_Master_Specification_SIH26123.pptx
+++ b/SWARMOS_Master_Specification_SIH26123.pptx
@@ -29,6 +29,7 @@
     <p:sldId id="277" r:id="rId28"/>
     <p:sldId id="278" r:id="rId29"/>
     <p:sldId id="279" r:id="rId30"/>
+    <p:sldId id="280" r:id="rId31"/>
   </p:sldIdLst>
   <p:sldSz cx="12191695" cy="6858000" type="screen4x3"/>
   <p:notesSz cx="6858000" cy="9144000"/>
@@ -7959,7 +7960,7 @@
                 </a:solidFill>
                 <a:latin typeface="Calibri"/>
               </a:rPr>
-              <a:t>C1 passes. C2 does not, and here is exactly why we are not claiming it.</a:t>
+              <a:t>C1 is met after we found and fixed two real defects. C2 is not met, and we say so.</a:t>
             </a:r>
           </a:p>
         </p:txBody>
@@ -7983,7 +7984,7 @@
           </a:solidFill>
           <a:ln w="15875">
             <a:solidFill>
-              <a:srgbClr val="35C78A"/>
+              <a:srgbClr val="3B9EFF"/>
             </a:solidFill>
           </a:ln>
           <a:effectLst/>
@@ -8014,11 +8015,11 @@
             <a:r>
               <a:rPr sz="3000" b="1">
                 <a:solidFill>
-                  <a:srgbClr val="35C78A"/>
-                </a:solidFill>
-                <a:latin typeface="Calibri"/>
-              </a:rPr>
-              <a:t>PASS</a:t>
+                  <a:srgbClr val="3B9EFF"/>
+                </a:solidFill>
+                <a:latin typeface="Calibri"/>
+              </a:rPr>
+              <a:t>9000</a:t>
             </a:r>
           </a:p>
           <a:p>
@@ -8034,7 +8035,7 @@
                 </a:solidFill>
                 <a:latin typeface="Calibri"/>
               </a:rPr>
-              <a:t>C1 zero collisions</a:t>
+              <a:t>ticks per run, 27 paired</a:t>
             </a:r>
           </a:p>
         </p:txBody>
@@ -8093,7 +8094,7 @@
                 </a:solidFill>
                 <a:latin typeface="Calibri"/>
               </a:rPr>
-              <a:t>0</a:t>
+              <a:t>7 -&gt; 0</a:t>
             </a:r>
           </a:p>
           <a:p>
@@ -8109,7 +8110,7 @@
                 </a:solidFill>
                 <a:latin typeface="Calibri"/>
               </a:rPr>
-              <a:t>collisions, 18 paired runs</a:t>
+              <a:t>SwarmOS collisions</a:t>
             </a:r>
           </a:p>
         </p:txBody>
@@ -8168,7 +8169,7 @@
                 </a:solidFill>
                 <a:latin typeface="Calibri"/>
               </a:rPr>
-              <a:t>+2.3 pct</a:t>
+              <a:t>-19.3 pct</a:t>
             </a:r>
           </a:p>
           <a:p>
@@ -8184,7 +8185,7 @@
                 </a:solidFill>
                 <a:latin typeface="Calibri"/>
               </a:rPr>
-              <a:t>C2 mean reduction</a:t>
+              <a:t>C2 mean, sign negative</a:t>
             </a:r>
           </a:p>
         </p:txBody>
@@ -8272,7 +8273,7 @@
         </p:nvSpPr>
         <p:spPr>
           <a:xfrm>
-            <a:off x="502920" y="2880360"/>
+            <a:off x="502920" y="2834640"/>
             <a:ext cx="11155680" cy="5120640"/>
           </a:xfrm>
           <a:prstGeom prst="rect">
@@ -8288,49 +8289,65 @@
           <a:p>
             <a:pPr>
               <a:spcAft>
-                <a:spcPts val="1100"/>
-              </a:spcAft>
-            </a:pPr>
-            <a:r>
-              <a:rPr sz="1400" b="0">
+                <a:spcPts val="900"/>
+              </a:spcAft>
+            </a:pPr>
+            <a:r>
+              <a:rPr sz="1300" b="0">
                 <a:solidFill>
                   <a:srgbClr val="E8ECF1"/>
                 </a:solidFill>
                 <a:latin typeface="Calibri"/>
               </a:rPr>
-              <a:t>C1: zero collisions across 18 paired runs, 3 scenarios, seeds 11/13/17, 1800 ticks, fleets of 24 to 50. We note honestly that the stop-and-wait baseline is also collision-free, so C1 is necessary rather than differentiating - what it shows is that negotiation, containment and sovereign fallback did not cost us the safety property.</a:t>
-            </a:r>
-          </a:p>
-          <a:p>
-            <a:pPr>
-              <a:spcAft>
-                <a:spcPts val="1100"/>
-              </a:spcAft>
-            </a:pPr>
-            <a:r>
-              <a:rPr sz="1400" b="0">
+              <a:t>C1: met on the current code - 27 paired runs, 3 scenarios, 9 seeds, 9000 ticks. It was NOT met a week ago. The 1800-tick run that reported PASS never reached the failure, which first appears at tick 700. Next slide is that story.</a:t>
+            </a:r>
+          </a:p>
+          <a:p>
+            <a:pPr>
+              <a:spcAft>
+                <a:spcPts val="900"/>
+              </a:spcAft>
+            </a:pPr>
+            <a:r>
+              <a:rPr sz="1300" b="0">
                 <a:solidFill>
                   <a:srgbClr val="E8ECF1"/>
                 </a:solidFill>
                 <a:latin typeface="Calibri"/>
               </a:rPr>
-              <a:t>C2: mean reduction over 9 paired runs is +2.3 percent against a 20 percent bar. The spread runs from -47.8 to +57.9 percent, and the cause is visible in the raw log: only 1 to 16 tasks complete per run, so avg_completion_s is dominated by single samples.</a:t>
-            </a:r>
-          </a:p>
-          <a:p>
-            <a:pPr>
-              <a:spcAft>
-                <a:spcPts val="1100"/>
-              </a:spcAft>
-            </a:pPr>
-            <a:r>
-              <a:rPr sz="1400" b="0">
+              <a:t>C1 is necessary, not differentiating: the stop-and-wait control is collision-free too. What it shows is that negotiation, containment and sovereign fallback did not cost us safety - not that they bought it.</a:t>
+            </a:r>
+          </a:p>
+          <a:p>
+            <a:pPr>
+              <a:spcAft>
+                <a:spcPts val="900"/>
+              </a:spcAft>
+            </a:pPr>
+            <a:r>
+              <a:rPr sz="1300" b="0">
                 <a:solidFill>
                   <a:srgbClr val="E8ECF1"/>
                 </a:solidFill>
                 <a:latin typeface="Calibri"/>
               </a:rPr>
-              <a:t>That is a defect in the measurement, not evidence about the design. It would be as wrong to headline +57.9 percent as to headline -47.8. The fix is specified: 18000 ticks, 15 to 20 seeds, and a confidence interval rather than a point estimate.</a:t>
+              <a:t>C2: NOT MET. Mean -19.3 percent, 95 percent CI [-36.0, -2.6]. It got worse when we fixed defect 2, which is the right direction: a sound step bound withholds speed the arbiter used to grant.</a:t>
+            </a:r>
+          </a:p>
+          <a:p>
+            <a:pPr>
+              <a:spcAft>
+                <a:spcPts val="900"/>
+              </a:spcAft>
+            </a:pPr>
+            <a:r>
+              <a:rPr sz="1300" b="0">
+                <a:solidFill>
+                  <a:srgbClr val="E8ECF1"/>
+                </a:solidFill>
+                <a:latin typeface="Calibri"/>
+              </a:rPr>
+              <a:t>Two findings matter more than that number. Task supply, not run length, binds - 9000 ticks of blocked_aisle is byte-identical to 1800. And avg_completion_s across arms is survivorship-biased: one seed scored +25.9 percent for us only because we finished 3 tasks to the baseline's 12.</a:t>
             </a:r>
           </a:p>
         </p:txBody>
@@ -8343,7 +8360,7 @@
         </p:nvSpPr>
         <p:spPr>
           <a:xfrm>
-            <a:off x="502920" y="5989320"/>
+            <a:off x="502920" y="6172200"/>
             <a:ext cx="11155680" cy="566928"/>
           </a:xfrm>
           <a:prstGeom prst="roundRect">
@@ -8389,7 +8406,7 @@
                 </a:solidFill>
                 <a:latin typeface="Calibri"/>
               </a:rPr>
-              <a:t>Full record with the per-seed table in docs/SUCCESS_CRITERIA_VERIFICATION.md, raw log in reports/criteria_1800.log.</a:t>
+              <a:t>Full record in docs/SUCCESS_CRITERIA_VERIFICATION.md, raw log in reports/criteria_after_envelope_fix.log. Reproduce with tools/verify_criteria_powered.py 9000 9.</a:t>
             </a:r>
           </a:p>
         </p:txBody>
@@ -8498,7 +8515,7 @@
                 </a:solidFill>
                 <a:latin typeface="Calibri"/>
               </a:rPr>
-              <a:t>Verification evidence</a:t>
+              <a:t>How C1 was actually won</a:t>
             </a:r>
           </a:p>
           <a:p>
@@ -8514,7 +8531,7 @@
                 </a:solidFill>
                 <a:latin typeface="Calibri"/>
               </a:rPr>
-              <a:t>What we can show on demand, in under a minute each</a:t>
+              <a:t>A safety argument only ever checked on short runs is not a safety argument</a:t>
             </a:r>
           </a:p>
         </p:txBody>
@@ -8529,7 +8546,7 @@
         </p:nvGraphicFramePr>
         <p:xfrm>
           <a:off x="502920" y="1371600"/>
-          <a:ext cx="11155680" cy="2048256"/>
+          <a:ext cx="11155680" cy="877824"/>
         </p:xfrm>
         <a:graphic>
           <a:graphicData uri="http://schemas.openxmlformats.org/drawingml/2006/table">
@@ -8538,23 +8555,36 @@
                 <a:tableStyleId>{5C22544A-7EE6-4342-B048-85BDC9FD1C3A}</a:tableStyleId>
               </a:tblPr>
               <a:tblGrid>
-                <a:gridCol w="3108960"/>
-                <a:gridCol w="3291840"/>
-                <a:gridCol w="4754880"/>
+                <a:gridCol w="457200"/>
+                <a:gridCol w="2103120"/>
+                <a:gridCol w="5029200"/>
+                <a:gridCol w="3566160"/>
               </a:tblGrid>
               <a:tr h="292608">
                 <a:tc>
                   <a:txBody>
                     <a:bodyPr/>
                     <a:lstStyle/>
-                    <a:p>
-                      <a:r>
-                        <a:rPr sz="1200" b="1">
+                    <a:p/>
+                  </a:txBody>
+                  <a:tcPr>
+                    <a:solidFill>
+                      <a:srgbClr val="1B212A"/>
+                    </a:solidFill>
+                  </a:tcPr>
+                </a:tc>
+                <a:tc>
+                  <a:txBody>
+                    <a:bodyPr/>
+                    <a:lstStyle/>
+                    <a:p>
+                      <a:r>
+                        <a:rPr sz="1100" b="1">
                           <a:solidFill>
                             <a:srgbClr val="3B9EFF"/>
                           </a:solidFill>
                         </a:rPr>
-                        <a:t>Evidence</a:t>
+                        <a:t>Defect</a:t>
                       </a:r>
                     </a:p>
                   </a:txBody>
@@ -8570,12 +8600,12 @@
                     <a:lstStyle/>
                     <a:p>
                       <a:r>
-                        <a:rPr sz="1200" b="1">
+                        <a:rPr sz="1100" b="1">
                           <a:solidFill>
                             <a:srgbClr val="3B9EFF"/>
                           </a:solidFill>
                         </a:rPr>
-                        <a:t>Where</a:t>
+                        <a:t>What it was</a:t>
                       </a:r>
                     </a:p>
                   </a:txBody>
@@ -8591,12 +8621,12 @@
                     <a:lstStyle/>
                     <a:p>
                       <a:r>
-                        <a:rPr sz="1200" b="1">
+                        <a:rPr sz="1100" b="1">
                           <a:solidFill>
                             <a:srgbClr val="3B9EFF"/>
                           </a:solidFill>
                         </a:rPr>
-                        <a:t>What it establishes</a:t>
+                        <a:t>Fix and effect</a:t>
                       </a:r>
                     </a:p>
                   </a:txBody>
@@ -8614,12 +8644,12 @@
                     <a:lstStyle/>
                     <a:p>
                       <a:r>
-                        <a:rPr sz="1200">
+                        <a:rPr sz="1100">
                           <a:solidFill>
                             <a:srgbClr val="E8ECF1"/>
                           </a:solidFill>
                         </a:rPr>
-                        <a:t>570 tests, all green</a:t>
+                        <a:t>1</a:t>
                       </a:r>
                     </a:p>
                   </a:txBody>
@@ -8635,12 +8665,12 @@
                     <a:lstStyle/>
                     <a:p>
                       <a:r>
-                        <a:rPr sz="1200">
+                        <a:rPr sz="1100">
                           <a:solidFill>
                             <a:srgbClr val="E8ECF1"/>
                           </a:solidFill>
                         </a:rPr>
-                        <a:t>20 files, 70 s wall clock</a:t>
+                        <a:t>Free waypoint snap</a:t>
                       </a:r>
                     </a:p>
                   </a:txBody>
@@ -8656,12 +8686,33 @@
                     <a:lstStyle/>
                     <a:p>
                       <a:r>
-                        <a:rPr sz="1200">
+                        <a:rPr sz="1100">
                           <a:solidFill>
                             <a:srgbClr val="E8ECF1"/>
                           </a:solidFill>
                         </a:rPr>
-                        <a:t>The gate. No skips, no xfail hiding a broken contract.</a:t>
+                        <a:t>SimRobot.step snapped onto a waypoint within 0.08 m charging neither moved nor budget - free travel every tick. A step cleared with 0.0039 m of margin reached 0.6962 m against a 0.75 m floor.</a:t>
+                      </a:r>
+                    </a:p>
+                  </a:txBody>
+                  <a:tcPr>
+                    <a:solidFill>
+                      <a:srgbClr val="12161C"/>
+                    </a:solidFill>
+                  </a:tcPr>
+                </a:tc>
+                <a:tc>
+                  <a:txBody>
+                    <a:bodyPr/>
+                    <a:lstStyle/>
+                    <a:p>
+                      <a:r>
+                        <a:rPr sz="1100">
+                          <a:solidFill>
+                            <a:srgbClr val="E8ECF1"/>
+                          </a:solidFill>
+                        </a:rPr>
+                        <a:t>Snap only when the budget affords it, and charge it. 7 -&gt; 1.</a:t>
                       </a:r>
                     </a:p>
                   </a:txBody>
@@ -8679,12 +8730,12 @@
                     <a:lstStyle/>
                     <a:p>
                       <a:r>
-                        <a:rPr sz="1200">
+                        <a:rPr sz="1100">
                           <a:solidFill>
                             <a:srgbClr val="E8ECF1"/>
                           </a:solidFill>
                         </a:rPr>
-                        <a:t>Structural ML fence</a:t>
+                        <a:t>2</a:t>
                       </a:r>
                     </a:p>
                   </a:txBody>
@@ -8700,12 +8751,12 @@
                     <a:lstStyle/>
                     <a:p>
                       <a:r>
-                        <a:rPr sz="1200">
+                        <a:rPr sz="1100">
                           <a:solidFill>
                             <a:srgbClr val="E8ECF1"/>
                           </a:solidFill>
                         </a:rPr>
-                        <a:t>tests/test_ml_fence.py</a:t>
+                        <a:t>Truncated step envelope</a:t>
                       </a:r>
                     </a:p>
                   </a:txBody>
@@ -8721,12 +8772,12 @@
                     <a:lstStyle/>
                     <a:p>
                       <a:r>
-                        <a:rPr sz="1200">
+                        <a:rPr sz="1100">
                           <a:solidFill>
                             <a:srgbClr val="E8ECF1"/>
                           </a:solidFill>
                         </a:rPr>
-                        <a:t>AST-walks the coordination package and fails if app.ml is imported.</a:t>
+                        <a:t>The monitor bounded its own step with project_step on the published intent, which stops at the end of a short path. A 0.0440 m projection made every swept gap read as the standing-still gap, so full speed was granted; the engine moved 0.0540 m into a stationary peer.</a:t>
                       </a:r>
                     </a:p>
                   </a:txBody>
@@ -8736,257 +8787,18 @@
                     </a:solidFill>
                   </a:tcPr>
                 </a:tc>
-              </a:tr>
-              <a:tr h="292608">
-                <a:tc>
-                  <a:txBody>
-                    <a:bodyPr/>
-                    <a:lstStyle/>
-                    <a:p>
-                      <a:r>
-                        <a:rPr sz="1200">
+                <a:tc>
+                  <a:txBody>
+                    <a:bodyPr/>
+                    <a:lstStyle/>
+                    <a:p>
+                      <a:r>
+                        <a:rPr sz="1100">
                           <a:solidFill>
                             <a:srgbClr val="E8ECF1"/>
                           </a:solidFill>
                         </a:rPr>
-                        <a:t>Deterministic replay</a:t>
-                      </a:r>
-                    </a:p>
-                  </a:txBody>
-                  <a:tcPr>
-                    <a:solidFill>
-                      <a:srgbClr val="12161C"/>
-                    </a:solidFill>
-                  </a:tcPr>
-                </a:tc>
-                <a:tc>
-                  <a:txBody>
-                    <a:bodyPr/>
-                    <a:lstStyle/>
-                    <a:p>
-                      <a:r>
-                        <a:rPr sz="1200">
-                          <a:solidFill>
-                            <a:srgbClr val="E8ECF1"/>
-                          </a:solidFill>
-                        </a:rPr>
-                        <a:t>trace_hash</a:t>
-                      </a:r>
-                    </a:p>
-                  </a:txBody>
-                  <a:tcPr>
-                    <a:solidFill>
-                      <a:srgbClr val="12161C"/>
-                    </a:solidFill>
-                  </a:tcPr>
-                </a:tc>
-                <a:tc>
-                  <a:txBody>
-                    <a:bodyPr/>
-                    <a:lstStyle/>
-                    <a:p>
-                      <a:r>
-                        <a:rPr sz="1200">
-                          <a:solidFill>
-                            <a:srgbClr val="E8ECF1"/>
-                          </a:solidFill>
-                        </a:rPr>
-                        <a:t>Same seed, same run, bit for bit - including under an impaired radio.</a:t>
-                      </a:r>
-                    </a:p>
-                  </a:txBody>
-                  <a:tcPr>
-                    <a:solidFill>
-                      <a:srgbClr val="12161C"/>
-                    </a:solidFill>
-                  </a:tcPr>
-                </a:tc>
-              </a:tr>
-              <a:tr h="292608">
-                <a:tc>
-                  <a:txBody>
-                    <a:bodyPr/>
-                    <a:lstStyle/>
-                    <a:p>
-                      <a:r>
-                        <a:rPr sz="1200">
-                          <a:solidFill>
-                            <a:srgbClr val="E8ECF1"/>
-                          </a:solidFill>
-                        </a:rPr>
-                        <a:t>Compute headroom</a:t>
-                      </a:r>
-                    </a:p>
-                  </a:txBody>
-                  <a:tcPr>
-                    <a:solidFill>
-                      <a:srgbClr val="1B212A"/>
-                    </a:solidFill>
-                  </a:tcPr>
-                </a:tc>
-                <a:tc>
-                  <a:txBody>
-                    <a:bodyPr/>
-                    <a:lstStyle/>
-                    <a:p>
-                      <a:r>
-                        <a:rPr sz="1200">
-                          <a:solidFill>
-                            <a:srgbClr val="E8ECF1"/>
-                          </a:solidFill>
-                        </a:rPr>
-                        <a:t>p95 10.14 ms / 100 ms</a:t>
-                      </a:r>
-                    </a:p>
-                  </a:txBody>
-                  <a:tcPr>
-                    <a:solidFill>
-                      <a:srgbClr val="1B212A"/>
-                    </a:solidFill>
-                  </a:tcPr>
-                </a:tc>
-                <a:tc>
-                  <a:txBody>
-                    <a:bodyPr/>
-                    <a:lstStyle/>
-                    <a:p>
-                      <a:r>
-                        <a:rPr sz="1200">
-                          <a:solidFill>
-                            <a:srgbClr val="E8ECF1"/>
-                          </a:solidFill>
-                        </a:rPr>
-                        <a:t>Measured in-engine at fleet 50, not asserted.</a:t>
-                      </a:r>
-                    </a:p>
-                  </a:txBody>
-                  <a:tcPr>
-                    <a:solidFill>
-                      <a:srgbClr val="1B212A"/>
-                    </a:solidFill>
-                  </a:tcPr>
-                </a:tc>
-              </a:tr>
-              <a:tr h="292608">
-                <a:tc>
-                  <a:txBody>
-                    <a:bodyPr/>
-                    <a:lstStyle/>
-                    <a:p>
-                      <a:r>
-                        <a:rPr sz="1200">
-                          <a:solidFill>
-                            <a:srgbClr val="E8ECF1"/>
-                          </a:solidFill>
-                        </a:rPr>
-                        <a:t>Forecaster decision</a:t>
-                      </a:r>
-                    </a:p>
-                  </a:txBody>
-                  <a:tcPr>
-                    <a:solidFill>
-                      <a:srgbClr val="12161C"/>
-                    </a:solidFill>
-                  </a:tcPr>
-                </a:tc>
-                <a:tc>
-                  <a:txBody>
-                    <a:bodyPr/>
-                    <a:lstStyle/>
-                    <a:p>
-                      <a:r>
-                        <a:rPr sz="1200">
-                          <a:solidFill>
-                            <a:srgbClr val="E8ECF1"/>
-                          </a:solidFill>
-                        </a:rPr>
-                        <a:t>docs/X05_FORECASTER_DECISION.md</a:t>
-                      </a:r>
-                    </a:p>
-                  </a:txBody>
-                  <a:tcPr>
-                    <a:solidFill>
-                      <a:srgbClr val="12161C"/>
-                    </a:solidFill>
-                  </a:tcPr>
-                </a:tc>
-                <a:tc>
-                  <a:txBody>
-                    <a:bodyPr/>
-                    <a:lstStyle/>
-                    <a:p>
-                      <a:r>
-                        <a:rPr sz="1200">
-                          <a:solidFill>
-                            <a:srgbClr val="E8ECF1"/>
-                          </a:solidFill>
-                        </a:rPr>
-                        <a:t>A measured negative result, written down.</a:t>
-                      </a:r>
-                    </a:p>
-                  </a:txBody>
-                  <a:tcPr>
-                    <a:solidFill>
-                      <a:srgbClr val="12161C"/>
-                    </a:solidFill>
-                  </a:tcPr>
-                </a:tc>
-              </a:tr>
-              <a:tr h="292608">
-                <a:tc>
-                  <a:txBody>
-                    <a:bodyPr/>
-                    <a:lstStyle/>
-                    <a:p>
-                      <a:r>
-                        <a:rPr sz="1200">
-                          <a:solidFill>
-                            <a:srgbClr val="E8ECF1"/>
-                          </a:solidFill>
-                        </a:rPr>
-                        <a:t>Criteria record</a:t>
-                      </a:r>
-                    </a:p>
-                  </a:txBody>
-                  <a:tcPr>
-                    <a:solidFill>
-                      <a:srgbClr val="1B212A"/>
-                    </a:solidFill>
-                  </a:tcPr>
-                </a:tc>
-                <a:tc>
-                  <a:txBody>
-                    <a:bodyPr/>
-                    <a:lstStyle/>
-                    <a:p>
-                      <a:r>
-                        <a:rPr sz="1200">
-                          <a:solidFill>
-                            <a:srgbClr val="E8ECF1"/>
-                          </a:solidFill>
-                        </a:rPr>
-                        <a:t>docs/SUCCESS_CRITERIA_VERIFICATION.md</a:t>
-                      </a:r>
-                    </a:p>
-                  </a:txBody>
-                  <a:tcPr>
-                    <a:solidFill>
-                      <a:srgbClr val="1B212A"/>
-                    </a:solidFill>
-                  </a:tcPr>
-                </a:tc>
-                <a:tc>
-                  <a:txBody>
-                    <a:bodyPr/>
-                    <a:lstStyle/>
-                    <a:p>
-                      <a:r>
-                        <a:rPr sz="1200">
-                          <a:solidFill>
-                            <a:srgbClr val="E8ECF1"/>
-                          </a:solidFill>
-                        </a:rPr>
-                        <a:t>Includes the criterion we did not meet.</a:t>
+                        <a:t>Keep the direction, extend the distance to MAX_STEP_M. 1 -&gt; 0.</a:t>
                       </a:r>
                     </a:p>
                   </a:txBody>
@@ -9003,13 +8815,68 @@
       </p:graphicFrame>
       <p:sp>
         <p:nvSpPr>
-          <p:cNvPr id="5" name="Rounded Rectangle 4"/>
+          <p:cNvPr id="5" name="TextBox 4"/>
+          <p:cNvSpPr txBox="1"/>
+          <p:nvPr/>
+        </p:nvSpPr>
+        <p:spPr>
+          <a:xfrm>
+            <a:off x="502920" y="4572000"/>
+            <a:ext cx="11155680" cy="5120640"/>
+          </a:xfrm>
+          <a:prstGeom prst="rect">
+            <a:avLst/>
+          </a:prstGeom>
+          <a:noFill/>
+        </p:spPr>
+        <p:txBody>
+          <a:bodyPr wrap="square">
+            <a:spAutoFit/>
+          </a:bodyPr>
+          <a:lstStyle/>
+          <a:p>
+            <a:pPr>
+              <a:spcAft>
+                <a:spcPts val="900"/>
+              </a:spcAft>
+            </a:pPr>
+            <a:r>
+              <a:rPr sz="1300" b="0">
+                <a:solidFill>
+                  <a:srgbClr val="E8ECF1"/>
+                </a:solidFill>
+                <a:latin typeface="Calibri"/>
+              </a:rPr>
+              <a:t>Both broke one invariant: granting speed_scale f must move a robot at most f * MAX_STEP_M. Once that is false no margin means anything - the arbiter is clearing a segment the engine does not respect.</a:t>
+            </a:r>
+          </a:p>
+          <a:p>
+            <a:pPr>
+              <a:spcAft>
+                <a:spcPts val="900"/>
+              </a:spcAft>
+            </a:pPr>
+            <a:r>
+              <a:rPr sz="1300" b="0">
+                <a:solidFill>
+                  <a:srgbClr val="E8ECF1"/>
+                </a:solidFill>
+                <a:latin typeface="Calibri"/>
+              </a:rPr>
+              <a:t>Defect 2 produced zero step-authority breaches, so the test that catches defect 1 was blind to it. Four tests now pin both, all four failing on the pre-fix code. Suite total: 575 passing.</a:t>
+            </a:r>
+          </a:p>
+        </p:txBody>
+      </p:sp>
+      <p:sp>
+        <p:nvSpPr>
+          <p:cNvPr id="6" name="Rounded Rectangle 5"/>
           <p:cNvSpPr/>
           <p:nvPr/>
         </p:nvSpPr>
         <p:spPr>
           <a:xfrm>
-            <a:off x="502920" y="5440680"/>
+            <a:off x="502920" y="6035040"/>
             <a:ext cx="11155680" cy="566928"/>
           </a:xfrm>
           <a:prstGeom prst="roundRect">
@@ -9020,7 +8887,7 @@
           </a:solidFill>
           <a:ln w="15875">
             <a:solidFill>
-              <a:srgbClr val="35C78A"/>
+              <a:srgbClr val="4FB3A6"/>
             </a:solidFill>
           </a:ln>
           <a:effectLst/>
@@ -9055,7 +8922,7 @@
                 </a:solidFill>
                 <a:latin typeface="Calibri"/>
               </a:rPr>
-              <a:t>Reproduce the gate: PYTEST_DISABLE_PLUGIN_AUTOLOAD=1 PYTHONPATH=. python3 -m pytest tests/ -q</a:t>
+              <a:t>We report this rather than quietly fixing it: the shape of the failure is the transferable lesson, and a judge who ran the demo past 180 seconds would have found it.</a:t>
             </a:r>
           </a:p>
         </p:txBody>
@@ -9594,7 +9461,7 @@
                 </a:solidFill>
                 <a:latin typeface="Calibri"/>
               </a:rPr>
-              <a:t>The demo, in six minutes</a:t>
+              <a:t>Verification evidence</a:t>
             </a:r>
           </a:p>
           <a:p>
@@ -9610,7 +9477,7 @@
                 </a:solidFill>
                 <a:latin typeface="Calibri"/>
               </a:rPr>
-              <a:t>Rehearsed, keyboard-driven, and every beat backed by a mechanism on the earlier slides</a:t>
+              <a:t>What we can show on demand, in under a minute each</a:t>
             </a:r>
           </a:p>
         </p:txBody>
@@ -9634,9 +9501,9 @@
                 <a:tableStyleId>{5C22544A-7EE6-4342-B048-85BDC9FD1C3A}</a:tableStyleId>
               </a:tblPr>
               <a:tblGrid>
-                <a:gridCol w="914400"/>
+                <a:gridCol w="3108960"/>
                 <a:gridCol w="3291840"/>
-                <a:gridCol w="6949440"/>
+                <a:gridCol w="4754880"/>
               </a:tblGrid>
               <a:tr h="292608">
                 <a:tc>
@@ -9650,7 +9517,7 @@
                             <a:srgbClr val="3B9EFF"/>
                           </a:solidFill>
                         </a:rPr>
-                        <a:t>T+</a:t>
+                        <a:t>Evidence</a:t>
                       </a:r>
                     </a:p>
                   </a:txBody>
@@ -9671,7 +9538,7 @@
                             <a:srgbClr val="3B9EFF"/>
                           </a:solidFill>
                         </a:rPr>
-                        <a:t>Beat</a:t>
+                        <a:t>Where</a:t>
                       </a:r>
                     </a:p>
                   </a:txBody>
@@ -9692,7 +9559,7 @@
                             <a:srgbClr val="3B9EFF"/>
                           </a:solidFill>
                         </a:rPr>
-                        <a:t>What the judge sees</a:t>
+                        <a:t>What it establishes</a:t>
                       </a:r>
                     </a:p>
                   </a:txBody>
@@ -9715,7 +9582,7 @@
                             <a:srgbClr val="E8ECF1"/>
                           </a:solidFill>
                         </a:rPr>
-                        <a:t>0:00</a:t>
+                        <a:t>570 tests, all green</a:t>
                       </a:r>
                     </a:p>
                   </a:txBody>
@@ -9736,7 +9603,7 @@
                             <a:srgbClr val="E8ECF1"/>
                           </a:solidFill>
                         </a:rPr>
-                        <a:t>Fleet running, 50 robots</a:t>
+                        <a:t>20 files, 70 s wall clock</a:t>
                       </a:r>
                     </a:p>
                   </a:txBody>
@@ -9757,7 +9624,7 @@
                             <a:srgbClr val="E8ECF1"/>
                           </a:solidFill>
                         </a:rPr>
-                        <a:t>Establish that it is real: live tick, live KPIs, one hero metric.</a:t>
+                        <a:t>The gate. No skips, no xfail hiding a broken contract.</a:t>
                       </a:r>
                     </a:p>
                   </a:txBody>
@@ -9780,7 +9647,7 @@
                             <a:srgbClr val="E8ECF1"/>
                           </a:solidFill>
                         </a:rPr>
-                        <a:t>1:00</a:t>
+                        <a:t>Structural ML fence</a:t>
                       </a:r>
                     </a:p>
                   </a:txBody>
@@ -9801,7 +9668,7 @@
                             <a:srgbClr val="E8ECF1"/>
                           </a:solidFill>
                         </a:rPr>
-                        <a:t>Select one robot</a:t>
+                        <a:t>tests/test_ml_fence.py</a:t>
                       </a:r>
                     </a:p>
                   </a:txBody>
@@ -9822,7 +9689,7 @@
                             <a:srgbClr val="E8ECF1"/>
                           </a:solidFill>
                         </a:rPr>
-                        <a:t>Its path, its peers, and the one-sentence reason for its current verdict.</a:t>
+                        <a:t>AST-walks the coordination package and fails if app.ml is imported.</a:t>
                       </a:r>
                     </a:p>
                   </a:txBody>
@@ -9845,7 +9712,7 @@
                             <a:srgbClr val="E8ECF1"/>
                           </a:solidFill>
                         </a:rPr>
-                        <a:t>2:00</a:t>
+                        <a:t>Deterministic replay</a:t>
                       </a:r>
                     </a:p>
                   </a:txBody>
@@ -9866,7 +9733,7 @@
                             <a:srgbClr val="E8ECF1"/>
                           </a:solidFill>
                         </a:rPr>
-                        <a:t>Force a corridor conflict</a:t>
+                        <a:t>trace_hash</a:t>
                       </a:r>
                     </a:p>
                   </a:txBody>
@@ -9887,7 +9754,7 @@
                             <a:srgbClr val="E8ECF1"/>
                           </a:solidFill>
                         </a:rPr>
-                        <a:t>Two robots meet in a 1.0 m aisle. Show the contest, and who yielded and why.</a:t>
+                        <a:t>Same seed, same run, bit for bit - including under an impaired radio.</a:t>
                       </a:r>
                     </a:p>
                   </a:txBody>
@@ -9910,7 +9777,7 @@
                             <a:srgbClr val="E8ECF1"/>
                           </a:solidFill>
                         </a:rPr>
-                        <a:t>3:00</a:t>
+                        <a:t>Compute headroom</a:t>
                       </a:r>
                     </a:p>
                   </a:txBody>
@@ -9931,7 +9798,7 @@
                             <a:srgbClr val="E8ECF1"/>
                           </a:solidFill>
                         </a:rPr>
-                        <a:t>Kill a robot's radio</a:t>
+                        <a:t>p95 10.14 ms / 100 ms</a:t>
                       </a:r>
                     </a:p>
                   </a:txBody>
@@ -9952,7 +9819,7 @@
                             <a:srgbClr val="E8ECF1"/>
                           </a:solidFill>
                         </a:rPr>
-                        <a:t>It enters sovereign mode: slower, wider margin, still working. Distinct colour.</a:t>
+                        <a:t>Measured in-engine at fleet 50, not asserted.</a:t>
                       </a:r>
                     </a:p>
                   </a:txBody>
@@ -9975,7 +9842,7 @@
                             <a:srgbClr val="E8ECF1"/>
                           </a:solidFill>
                         </a:rPr>
-                        <a:t>4:00</a:t>
+                        <a:t>Forecaster decision</a:t>
                       </a:r>
                     </a:p>
                   </a:txBody>
@@ -9996,7 +9863,7 @@
                             <a:srgbClr val="E8ECF1"/>
                           </a:solidFill>
                         </a:rPr>
-                        <a:t>Turn one robot rogue</a:t>
+                        <a:t>docs/X05_FORECASTER_DECISION.md</a:t>
                       </a:r>
                     </a:p>
                   </a:txBody>
@@ -10017,7 +9884,7 @@
                             <a:srgbClr val="E8ECF1"/>
                           </a:solidFill>
                         </a:rPr>
-                        <a:t>Detect, quarantine, route around. The fleet keeps running.</a:t>
+                        <a:t>A measured negative result, written down.</a:t>
                       </a:r>
                     </a:p>
                   </a:txBody>
@@ -10040,7 +9907,7 @@
                             <a:srgbClr val="E8ECF1"/>
                           </a:solidFill>
                         </a:rPr>
-                        <a:t>5:00</a:t>
+                        <a:t>Criteria record</a:t>
                       </a:r>
                     </a:p>
                   </a:txBody>
@@ -10061,7 +9928,7 @@
                             <a:srgbClr val="E8ECF1"/>
                           </a:solidFill>
                         </a:rPr>
-                        <a:t>Co-simulation split screen</a:t>
+                        <a:t>docs/SUCCESS_CRITERIA_VERIFICATION.md</a:t>
                       </a:r>
                     </a:p>
                   </a:txBody>
@@ -10082,7 +9949,7 @@
                             <a:srgbClr val="E8ECF1"/>
                           </a:solidFill>
                         </a:rPr>
-                        <a:t>Same future, baseline arm beside ours. Then the replay: same seed, same run.</a:t>
+                        <a:t>Includes the criterion we did not meet.</a:t>
                       </a:r>
                     </a:p>
                   </a:txBody>
@@ -10116,7 +9983,7 @@
           </a:solidFill>
           <a:ln w="15875">
             <a:solidFill>
-              <a:srgbClr val="3B9EFF"/>
+              <a:srgbClr val="35C78A"/>
             </a:solidFill>
           </a:ln>
           <a:effectLst/>
@@ -10151,7 +10018,7 @@
                 </a:solidFill>
                 <a:latin typeface="Calibri"/>
               </a:rPr>
-              <a:t>Every beat is triggered by a key binding. Nothing in the demo depends on clicking a moving target.</a:t>
+              <a:t>Reproduce the gate: PYTEST_DISABLE_PLUGIN_AUTOLOAD=1 PYTHONPATH=. python3 -m pytest tests/ -q</a:t>
             </a:r>
           </a:p>
         </p:txBody>
@@ -10260,7 +10127,7 @@
                 </a:solidFill>
                 <a:latin typeface="Calibri"/>
               </a:rPr>
-              <a:t>Questions we expect, and the honest answer</a:t>
+              <a:t>The demo, in six minutes</a:t>
             </a:r>
           </a:p>
           <a:p>
@@ -10276,7 +10143,7 @@
                 </a:solidFill>
                 <a:latin typeface="Calibri"/>
               </a:rPr>
-              <a:t>Prepared, not improvised</a:t>
+              <a:t>Rehearsed, keyboard-driven, and every beat backed by a mechanism on the earlier slides</a:t>
             </a:r>
           </a:p>
         </p:txBody>
@@ -10290,8 +10157,8 @@
           <p:nvPr/>
         </p:nvGraphicFramePr>
         <p:xfrm>
-          <a:off x="502920" y="1325880"/>
-          <a:ext cx="11155680" cy="1755648"/>
+          <a:off x="502920" y="1371600"/>
+          <a:ext cx="11155680" cy="2048256"/>
         </p:xfrm>
         <a:graphic>
           <a:graphicData uri="http://schemas.openxmlformats.org/drawingml/2006/table">
@@ -10300,8 +10167,9 @@
                 <a:tableStyleId>{5C22544A-7EE6-4342-B048-85BDC9FD1C3A}</a:tableStyleId>
               </a:tblPr>
               <a:tblGrid>
-                <a:gridCol w="4023360"/>
-                <a:gridCol w="7132320"/>
+                <a:gridCol w="914400"/>
+                <a:gridCol w="3291840"/>
+                <a:gridCol w="6949440"/>
               </a:tblGrid>
               <a:tr h="292608">
                 <a:tc>
@@ -10310,12 +10178,12 @@
                     <a:lstStyle/>
                     <a:p>
                       <a:r>
-                        <a:rPr sz="1100" b="1">
+                        <a:rPr sz="1200" b="1">
                           <a:solidFill>
                             <a:srgbClr val="3B9EFF"/>
                           </a:solidFill>
                         </a:rPr>
-                        <a:t>Question</a:t>
+                        <a:t>T+</a:t>
                       </a:r>
                     </a:p>
                   </a:txBody>
@@ -10331,12 +10199,33 @@
                     <a:lstStyle/>
                     <a:p>
                       <a:r>
-                        <a:rPr sz="1100" b="1">
+                        <a:rPr sz="1200" b="1">
                           <a:solidFill>
                             <a:srgbClr val="3B9EFF"/>
                           </a:solidFill>
                         </a:rPr>
-                        <a:t>Answer</a:t>
+                        <a:t>Beat</a:t>
+                      </a:r>
+                    </a:p>
+                  </a:txBody>
+                  <a:tcPr>
+                    <a:solidFill>
+                      <a:srgbClr val="1B212A"/>
+                    </a:solidFill>
+                  </a:tcPr>
+                </a:tc>
+                <a:tc>
+                  <a:txBody>
+                    <a:bodyPr/>
+                    <a:lstStyle/>
+                    <a:p>
+                      <a:r>
+                        <a:rPr sz="1200" b="1">
+                          <a:solidFill>
+                            <a:srgbClr val="3B9EFF"/>
+                          </a:solidFill>
+                        </a:rPr>
+                        <a:t>What the judge sees</a:t>
                       </a:r>
                     </a:p>
                   </a:txBody>
@@ -10354,12 +10243,12 @@
                     <a:lstStyle/>
                     <a:p>
                       <a:r>
-                        <a:rPr sz="1100">
+                        <a:rPr sz="1200">
                           <a:solidFill>
                             <a:srgbClr val="E8ECF1"/>
                           </a:solidFill>
                         </a:rPr>
-                        <a:t>Is this really decentralised, or is the server the brain?</a:t>
+                        <a:t>0:00</a:t>
                       </a:r>
                     </a:p>
                   </a:txBody>
@@ -10375,12 +10264,33 @@
                     <a:lstStyle/>
                     <a:p>
                       <a:r>
-                        <a:rPr sz="1100">
+                        <a:rPr sz="1200">
                           <a:solidFill>
                             <a:srgbClr val="E8ECF1"/>
                           </a:solidFill>
                         </a:rPr>
-                        <a:t>The server is a viewport. Every binding decision is made inside a robot agent from a 15 m horizon. Kill the socket and the fleet keeps coordinating.</a:t>
+                        <a:t>Fleet running, 50 robots</a:t>
+                      </a:r>
+                    </a:p>
+                  </a:txBody>
+                  <a:tcPr>
+                    <a:solidFill>
+                      <a:srgbClr val="12161C"/>
+                    </a:solidFill>
+                  </a:tcPr>
+                </a:tc>
+                <a:tc>
+                  <a:txBody>
+                    <a:bodyPr/>
+                    <a:lstStyle/>
+                    <a:p>
+                      <a:r>
+                        <a:rPr sz="1200">
+                          <a:solidFill>
+                            <a:srgbClr val="E8ECF1"/>
+                          </a:solidFill>
+                        </a:rPr>
+                        <a:t>Establish that it is real: live tick, live KPIs, one hero metric.</a:t>
                       </a:r>
                     </a:p>
                   </a:txBody>
@@ -10398,12 +10308,12 @@
                     <a:lstStyle/>
                     <a:p>
                       <a:r>
-                        <a:rPr sz="1100">
+                        <a:rPr sz="1200">
                           <a:solidFill>
                             <a:srgbClr val="E8ECF1"/>
                           </a:solidFill>
                         </a:rPr>
-                        <a:t>Where is the AI?</a:t>
+                        <a:t>1:00</a:t>
                       </a:r>
                     </a:p>
                   </a:txBody>
@@ -10419,12 +10329,33 @@
                     <a:lstStyle/>
                     <a:p>
                       <a:r>
-                        <a:rPr sz="1100">
+                        <a:rPr sz="1200">
                           <a:solidFill>
                             <a:srgbClr val="E8ECF1"/>
                           </a:solidFill>
                         </a:rPr>
-                        <a:t>Advisory, and measured. It lost to persistence by 4x, so we fenced it out of the safety path and documented why. The intelligence in the safety path is the arbitration, not a model.</a:t>
+                        <a:t>Select one robot</a:t>
+                      </a:r>
+                    </a:p>
+                  </a:txBody>
+                  <a:tcPr>
+                    <a:solidFill>
+                      <a:srgbClr val="1B212A"/>
+                    </a:solidFill>
+                  </a:tcPr>
+                </a:tc>
+                <a:tc>
+                  <a:txBody>
+                    <a:bodyPr/>
+                    <a:lstStyle/>
+                    <a:p>
+                      <a:r>
+                        <a:rPr sz="1200">
+                          <a:solidFill>
+                            <a:srgbClr val="E8ECF1"/>
+                          </a:solidFill>
+                        </a:rPr>
+                        <a:t>Its path, its peers, and the one-sentence reason for its current verdict.</a:t>
                       </a:r>
                     </a:p>
                   </a:txBody>
@@ -10442,12 +10373,12 @@
                     <a:lstStyle/>
                     <a:p>
                       <a:r>
-                        <a:rPr sz="1100">
+                        <a:rPr sz="1200">
                           <a:solidFill>
                             <a:srgbClr val="E8ECF1"/>
                           </a:solidFill>
                         </a:rPr>
-                        <a:t>Did you hit the 20 percent target?</a:t>
+                        <a:t>2:00</a:t>
                       </a:r>
                     </a:p>
                   </a:txBody>
@@ -10463,12 +10394,33 @@
                     <a:lstStyle/>
                     <a:p>
                       <a:r>
-                        <a:rPr sz="1100">
+                        <a:rPr sz="1200">
                           <a:solidFill>
                             <a:srgbClr val="E8ECF1"/>
                           </a:solidFill>
                         </a:rPr>
-                        <a:t>No. +2.3 percent mean, and the measurement is under-powered at n of 1 to 16 tasks. Here is the table, and here is the run that would settle it.</a:t>
+                        <a:t>Force a corridor conflict</a:t>
+                      </a:r>
+                    </a:p>
+                  </a:txBody>
+                  <a:tcPr>
+                    <a:solidFill>
+                      <a:srgbClr val="12161C"/>
+                    </a:solidFill>
+                  </a:tcPr>
+                </a:tc>
+                <a:tc>
+                  <a:txBody>
+                    <a:bodyPr/>
+                    <a:lstStyle/>
+                    <a:p>
+                      <a:r>
+                        <a:rPr sz="1200">
+                          <a:solidFill>
+                            <a:srgbClr val="E8ECF1"/>
+                          </a:solidFill>
+                        </a:rPr>
+                        <a:t>Two robots meet in a 1.0 m aisle. Show the contest, and who yielded and why.</a:t>
                       </a:r>
                     </a:p>
                   </a:txBody>
@@ -10486,12 +10438,12 @@
                     <a:lstStyle/>
                     <a:p>
                       <a:r>
-                        <a:rPr sz="1100">
+                        <a:rPr sz="1200">
                           <a:solidFill>
                             <a:srgbClr val="E8ECF1"/>
                           </a:solidFill>
                         </a:rPr>
-                        <a:t>What happens when the network dies?</a:t>
+                        <a:t>3:00</a:t>
                       </a:r>
                     </a:p>
                   </a:txBody>
@@ -10507,12 +10459,33 @@
                     <a:lstStyle/>
                     <a:p>
                       <a:r>
-                        <a:rPr sz="1100">
+                        <a:rPr sz="1200">
                           <a:solidFill>
                             <a:srgbClr val="E8ECF1"/>
                           </a:solidFill>
                         </a:rPr>
-                        <a:t>Sovereign mode. Speed capped at half, margin widened by 0.35 m, existing reservations only. Visible in the UI and in a KPI.</a:t>
+                        <a:t>Kill a robot's radio</a:t>
+                      </a:r>
+                    </a:p>
+                  </a:txBody>
+                  <a:tcPr>
+                    <a:solidFill>
+                      <a:srgbClr val="1B212A"/>
+                    </a:solidFill>
+                  </a:tcPr>
+                </a:tc>
+                <a:tc>
+                  <a:txBody>
+                    <a:bodyPr/>
+                    <a:lstStyle/>
+                    <a:p>
+                      <a:r>
+                        <a:rPr sz="1200">
+                          <a:solidFill>
+                            <a:srgbClr val="E8ECF1"/>
+                          </a:solidFill>
+                        </a:rPr>
+                        <a:t>It enters sovereign mode: slower, wider margin, still working. Distinct colour.</a:t>
                       </a:r>
                     </a:p>
                   </a:txBody>
@@ -10530,12 +10503,12 @@
                     <a:lstStyle/>
                     <a:p>
                       <a:r>
-                        <a:rPr sz="1100">
+                        <a:rPr sz="1200">
                           <a:solidFill>
                             <a:srgbClr val="E8ECF1"/>
                           </a:solidFill>
                         </a:rPr>
-                        <a:t>Would this scale to 500 robots?</a:t>
+                        <a:t>4:00</a:t>
                       </a:r>
                     </a:p>
                   </a:txBody>
@@ -10551,18 +10524,104 @@
                     <a:lstStyle/>
                     <a:p>
                       <a:r>
-                        <a:rPr sz="1100">
+                        <a:rPr sz="1200">
                           <a:solidFill>
                             <a:srgbClr val="E8ECF1"/>
                           </a:solidFill>
                         </a:rPr>
-                        <a:t>Message cost is O(k) in local density, tested at 8, 32 and 64 on the same pitch. Compute p95 is 10 ms of a 100 ms budget at 50. We have not run 500, so we will not claim 500.</a:t>
+                        <a:t>Turn one robot rogue</a:t>
                       </a:r>
                     </a:p>
                   </a:txBody>
                   <a:tcPr>
                     <a:solidFill>
                       <a:srgbClr val="12161C"/>
+                    </a:solidFill>
+                  </a:tcPr>
+                </a:tc>
+                <a:tc>
+                  <a:txBody>
+                    <a:bodyPr/>
+                    <a:lstStyle/>
+                    <a:p>
+                      <a:r>
+                        <a:rPr sz="1200">
+                          <a:solidFill>
+                            <a:srgbClr val="E8ECF1"/>
+                          </a:solidFill>
+                        </a:rPr>
+                        <a:t>Detect, quarantine, route around. The fleet keeps running.</a:t>
+                      </a:r>
+                    </a:p>
+                  </a:txBody>
+                  <a:tcPr>
+                    <a:solidFill>
+                      <a:srgbClr val="12161C"/>
+                    </a:solidFill>
+                  </a:tcPr>
+                </a:tc>
+              </a:tr>
+              <a:tr h="292608">
+                <a:tc>
+                  <a:txBody>
+                    <a:bodyPr/>
+                    <a:lstStyle/>
+                    <a:p>
+                      <a:r>
+                        <a:rPr sz="1200">
+                          <a:solidFill>
+                            <a:srgbClr val="E8ECF1"/>
+                          </a:solidFill>
+                        </a:rPr>
+                        <a:t>5:00</a:t>
+                      </a:r>
+                    </a:p>
+                  </a:txBody>
+                  <a:tcPr>
+                    <a:solidFill>
+                      <a:srgbClr val="1B212A"/>
+                    </a:solidFill>
+                  </a:tcPr>
+                </a:tc>
+                <a:tc>
+                  <a:txBody>
+                    <a:bodyPr/>
+                    <a:lstStyle/>
+                    <a:p>
+                      <a:r>
+                        <a:rPr sz="1200">
+                          <a:solidFill>
+                            <a:srgbClr val="E8ECF1"/>
+                          </a:solidFill>
+                        </a:rPr>
+                        <a:t>Co-simulation split screen</a:t>
+                      </a:r>
+                    </a:p>
+                  </a:txBody>
+                  <a:tcPr>
+                    <a:solidFill>
+                      <a:srgbClr val="1B212A"/>
+                    </a:solidFill>
+                  </a:tcPr>
+                </a:tc>
+                <a:tc>
+                  <a:txBody>
+                    <a:bodyPr/>
+                    <a:lstStyle/>
+                    <a:p>
+                      <a:r>
+                        <a:rPr sz="1200">
+                          <a:solidFill>
+                            <a:srgbClr val="E8ECF1"/>
+                          </a:solidFill>
+                        </a:rPr>
+                        <a:t>Same future, baseline arm beside ours. Then the replay: same seed, same run.</a:t>
+                      </a:r>
+                    </a:p>
+                  </a:txBody>
+                  <a:tcPr>
+                    <a:solidFill>
+                      <a:srgbClr val="1B212A"/>
                     </a:solidFill>
                   </a:tcPr>
                 </a:tc>
@@ -10571,6 +10630,65 @@
           </a:graphicData>
         </a:graphic>
       </p:graphicFrame>
+      <p:sp>
+        <p:nvSpPr>
+          <p:cNvPr id="5" name="Rounded Rectangle 4"/>
+          <p:cNvSpPr/>
+          <p:nvPr/>
+        </p:nvSpPr>
+        <p:spPr>
+          <a:xfrm>
+            <a:off x="502920" y="5440680"/>
+            <a:ext cx="11155680" cy="566928"/>
+          </a:xfrm>
+          <a:prstGeom prst="roundRect">
+            <a:avLst/>
+          </a:prstGeom>
+          <a:solidFill>
+            <a:srgbClr val="1B212A"/>
+          </a:solidFill>
+          <a:ln w="15875">
+            <a:solidFill>
+              <a:srgbClr val="3B9EFF"/>
+            </a:solidFill>
+          </a:ln>
+          <a:effectLst/>
+        </p:spPr>
+        <p:style>
+          <a:lnRef idx="1">
+            <a:schemeClr val="accent1"/>
+          </a:lnRef>
+          <a:fillRef idx="3">
+            <a:schemeClr val="accent1"/>
+          </a:fillRef>
+          <a:effectRef idx="2">
+            <a:schemeClr val="accent1"/>
+          </a:effectRef>
+          <a:fontRef idx="minor">
+            <a:schemeClr val="lt1"/>
+          </a:fontRef>
+        </p:style>
+        <p:txBody>
+          <a:bodyPr rtlCol="0" anchor="ctr" wrap="square" lIns="164592" tIns="73152"/>
+          <a:lstStyle/>
+          <a:p>
+            <a:pPr algn="ctr">
+              <a:spcAft>
+                <a:spcPts val="400"/>
+              </a:spcAft>
+            </a:pPr>
+            <a:r>
+              <a:rPr sz="1200" b="1">
+                <a:solidFill>
+                  <a:srgbClr val="E8ECF1"/>
+                </a:solidFill>
+                <a:latin typeface="Calibri"/>
+              </a:rPr>
+              <a:t>Every beat is triggered by a key binding. Nothing in the demo depends on clicking a moving target.</a:t>
+            </a:r>
+          </a:p>
+        </p:txBody>
+      </p:sp>
     </p:spTree>
   </p:cSld>
   <p:clrMapOvr>
@@ -10675,7 +10793,7 @@
                 </a:solidFill>
                 <a:latin typeface="Calibri"/>
               </a:rPr>
-              <a:t>What we claim, and what we do not</a:t>
+              <a:t>Questions we expect, and the honest answer</a:t>
             </a:r>
           </a:p>
           <a:p>
@@ -10691,380 +10809,301 @@
                 </a:solidFill>
                 <a:latin typeface="Calibri"/>
               </a:rPr>
-              <a:t>The second list is the reason to believe the first</a:t>
-            </a:r>
-          </a:p>
-        </p:txBody>
-      </p:sp>
-      <p:sp>
-        <p:nvSpPr>
-          <p:cNvPr id="4" name="Rounded Rectangle 3"/>
-          <p:cNvSpPr/>
+              <a:t>Prepared, not improvised</a:t>
+            </a:r>
+          </a:p>
+        </p:txBody>
+      </p:sp>
+      <p:graphicFrame>
+        <p:nvGraphicFramePr>
+          <p:cNvPr id="4" name="Table 3"/>
+          <p:cNvGraphicFramePr>
+            <a:graphicFrameLocks noGrp="1"/>
+          </p:cNvGraphicFramePr>
           <p:nvPr/>
-        </p:nvSpPr>
-        <p:spPr>
-          <a:xfrm>
-            <a:off x="502920" y="1234440"/>
-            <a:ext cx="5394960" cy="4572000"/>
-          </a:xfrm>
-          <a:prstGeom prst="roundRect">
-            <a:avLst/>
-          </a:prstGeom>
-          <a:solidFill>
-            <a:srgbClr val="1B212A"/>
-          </a:solidFill>
-          <a:ln w="15875">
-            <a:solidFill>
-              <a:srgbClr val="35C78A"/>
-            </a:solidFill>
-          </a:ln>
-          <a:effectLst/>
-        </p:spPr>
-        <p:style>
-          <a:lnRef idx="1">
-            <a:schemeClr val="accent1"/>
-          </a:lnRef>
-          <a:fillRef idx="3">
-            <a:schemeClr val="accent1"/>
-          </a:fillRef>
-          <a:effectRef idx="2">
-            <a:schemeClr val="accent1"/>
-          </a:effectRef>
-          <a:fontRef idx="minor">
-            <a:schemeClr val="lt1"/>
-          </a:fontRef>
-        </p:style>
-        <p:txBody>
-          <a:bodyPr rtlCol="0" anchor="ctr" wrap="square" lIns="182880" tIns="128016" rIns="146304"/>
-          <a:lstStyle/>
-          <a:p>
-            <a:pPr algn="ctr">
-              <a:spcAft>
-                <a:spcPts val="800"/>
-              </a:spcAft>
-            </a:pPr>
-            <a:r>
-              <a:rPr sz="1500" b="1">
-                <a:solidFill>
-                  <a:srgbClr val="35C78A"/>
-                </a:solidFill>
-                <a:latin typeface="Calibri"/>
-              </a:rPr>
-              <a:t>We claim, and can demonstrate</a:t>
-            </a:r>
-          </a:p>
-          <a:p>
-            <a:pPr>
-              <a:spcAft>
-                <a:spcPts val="600"/>
-              </a:spcAft>
-            </a:pPr>
-            <a:r>
-              <a:rPr sz="1200" b="0">
-                <a:solidFill>
-                  <a:srgbClr val="E8ECF1"/>
-                </a:solidFill>
-                <a:latin typeface="Calibri"/>
-              </a:rPr>
-              <a:t>Zero collisions - enforced geometrically and pinned by tests.</a:t>
-            </a:r>
-          </a:p>
-          <a:p>
-            <a:pPr>
-              <a:spcAft>
-                <a:spcPts val="600"/>
-              </a:spcAft>
-            </a:pPr>
-            <a:r>
-              <a:rPr sz="1200" b="0">
-                <a:solidFill>
-                  <a:srgbClr val="E8ECF1"/>
-                </a:solidFill>
-                <a:latin typeface="Calibri"/>
-              </a:rPr>
-              <a:t>Deterministic replay from a seed, via trace hash.</a:t>
-            </a:r>
-          </a:p>
-          <a:p>
-            <a:pPr>
-              <a:spcAft>
-                <a:spcPts val="600"/>
-              </a:spcAft>
-            </a:pPr>
-            <a:r>
-              <a:rPr sz="1200" b="0">
-                <a:solidFill>
-                  <a:srgbClr val="E8ECF1"/>
-                </a:solidFill>
-                <a:latin typeface="Calibri"/>
-              </a:rPr>
-              <a:t>Simplex runtime assurance: a verifiable monitor beneath an unverifiable planner.</a:t>
-            </a:r>
-          </a:p>
-          <a:p>
-            <a:pPr>
-              <a:spcAft>
-                <a:spcPts val="600"/>
-              </a:spcAft>
-            </a:pPr>
-            <a:r>
-              <a:rPr sz="1200" b="0">
-                <a:solidFill>
-                  <a:srgbClr val="E8ECF1"/>
-                </a:solidFill>
-                <a:latin typeface="Calibri"/>
-              </a:rPr>
-              <a:t>Adversarial robot detection, quarantine and route-around.</a:t>
-            </a:r>
-          </a:p>
-          <a:p>
-            <a:pPr>
-              <a:spcAft>
-                <a:spcPts val="600"/>
-              </a:spcAft>
-            </a:pPr>
-            <a:r>
-              <a:rPr sz="1200" b="0">
-                <a:solidFill>
-                  <a:srgbClr val="E8ECF1"/>
-                </a:solidFill>
-                <a:latin typeface="Calibri"/>
-              </a:rPr>
-              <a:t>Sovereign operation after total radio loss, under a stated envelope.</a:t>
-            </a:r>
-          </a:p>
-          <a:p>
-            <a:pPr>
-              <a:spcAft>
-                <a:spcPts val="600"/>
-              </a:spcAft>
-            </a:pPr>
-            <a:r>
-              <a:rPr sz="1200" b="0">
-                <a:solidFill>
-                  <a:srgbClr val="E8ECF1"/>
-                </a:solidFill>
-                <a:latin typeface="Calibri"/>
-              </a:rPr>
-              <a:t>O(k) message cost in local density, not fleet size.</a:t>
-            </a:r>
-          </a:p>
-          <a:p>
-            <a:pPr>
-              <a:spcAft>
-                <a:spcPts val="600"/>
-              </a:spcAft>
-            </a:pPr>
-            <a:r>
-              <a:rPr sz="1200" b="0">
-                <a:solidFill>
-                  <a:srgbClr val="E8ECF1"/>
-                </a:solidFill>
-                <a:latin typeface="Calibri"/>
-              </a:rPr>
-              <a:t>10 ms p95 tick compute against a 100 ms budget at fleet 50.</a:t>
-            </a:r>
-          </a:p>
-        </p:txBody>
-      </p:sp>
-      <p:sp>
-        <p:nvSpPr>
-          <p:cNvPr id="5" name="Rounded Rectangle 4"/>
-          <p:cNvSpPr/>
-          <p:nvPr/>
-        </p:nvSpPr>
-        <p:spPr>
-          <a:xfrm>
-            <a:off x="6263640" y="1234440"/>
-            <a:ext cx="5394960" cy="4572000"/>
-          </a:xfrm>
-          <a:prstGeom prst="roundRect">
-            <a:avLst/>
-          </a:prstGeom>
-          <a:solidFill>
-            <a:srgbClr val="1B212A"/>
-          </a:solidFill>
-          <a:ln w="15875">
-            <a:solidFill>
-              <a:srgbClr val="E55B5B"/>
-            </a:solidFill>
-          </a:ln>
-          <a:effectLst/>
-        </p:spPr>
-        <p:style>
-          <a:lnRef idx="1">
-            <a:schemeClr val="accent1"/>
-          </a:lnRef>
-          <a:fillRef idx="3">
-            <a:schemeClr val="accent1"/>
-          </a:fillRef>
-          <a:effectRef idx="2">
-            <a:schemeClr val="accent1"/>
-          </a:effectRef>
-          <a:fontRef idx="minor">
-            <a:schemeClr val="lt1"/>
-          </a:fontRef>
-        </p:style>
-        <p:txBody>
-          <a:bodyPr rtlCol="0" anchor="ctr" wrap="square" lIns="182880" tIns="128016" rIns="146304"/>
-          <a:lstStyle/>
-          <a:p>
-            <a:pPr algn="ctr">
-              <a:spcAft>
-                <a:spcPts val="800"/>
-              </a:spcAft>
-            </a:pPr>
-            <a:r>
-              <a:rPr sz="1500" b="1">
-                <a:solidFill>
-                  <a:srgbClr val="E55B5B"/>
-                </a:solidFill>
-                <a:latin typeface="Calibri"/>
-              </a:rPr>
-              <a:t>We do not claim</a:t>
-            </a:r>
-          </a:p>
-          <a:p>
-            <a:pPr>
-              <a:spcAft>
-                <a:spcPts val="600"/>
-              </a:spcAft>
-            </a:pPr>
-            <a:r>
-              <a:rPr sz="1200" b="0">
-                <a:solidFill>
-                  <a:srgbClr val="E8ECF1"/>
-                </a:solidFill>
-                <a:latin typeface="Calibri"/>
-              </a:rPr>
-              <a:t>The 20 percent completion-time reduction. Measured at +2.3 percent, under-powered, and not yet answered.</a:t>
-            </a:r>
-          </a:p>
-          <a:p>
-            <a:pPr>
-              <a:spcAft>
-                <a:spcPts val="600"/>
-              </a:spcAft>
-            </a:pPr>
-            <a:r>
-              <a:rPr sz="1200" b="0">
-                <a:solidFill>
-                  <a:srgbClr val="E8ECF1"/>
-                </a:solidFill>
-                <a:latin typeface="Calibri"/>
-              </a:rPr>
-              <a:t>That our forecaster is good. It is worse than persistence and we published the number.</a:t>
-            </a:r>
-          </a:p>
-          <a:p>
-            <a:pPr>
-              <a:spcAft>
-                <a:spcPts val="600"/>
-              </a:spcAft>
-            </a:pPr>
-            <a:r>
-              <a:rPr sz="1200" b="0">
-                <a:solidFill>
-                  <a:srgbClr val="E8ECF1"/>
-                </a:solidFill>
-                <a:latin typeface="Calibri"/>
-              </a:rPr>
-              <a:t>Operation at 500 robots. Untested, therefore unclaimed.</a:t>
-            </a:r>
-          </a:p>
-          <a:p>
-            <a:pPr>
-              <a:spcAft>
-                <a:spcPts val="600"/>
-              </a:spcAft>
-            </a:pPr>
-            <a:r>
-              <a:rPr sz="1200" b="0">
-                <a:solidFill>
-                  <a:srgbClr val="E8ECF1"/>
-                </a:solidFill>
-                <a:latin typeface="Calibri"/>
-              </a:rPr>
-              <a:t>Hardware validation. This is a simulation-backed software stack, and the physics is deliberately simple.</a:t>
-            </a:r>
-          </a:p>
-          <a:p>
-            <a:pPr>
-              <a:spcAft>
-                <a:spcPts val="600"/>
-              </a:spcAft>
-            </a:pPr>
-            <a:r>
-              <a:rPr sz="1200" b="0">
-                <a:solidFill>
-                  <a:srgbClr val="E8ECF1"/>
-                </a:solidFill>
-                <a:latin typeface="Calibri"/>
-              </a:rPr>
-              <a:t>Novelty for N1, N2, N4 and N6 - those are competent engineering, not contributions.</a:t>
-            </a:r>
-          </a:p>
-        </p:txBody>
-      </p:sp>
-      <p:sp>
-        <p:nvSpPr>
-          <p:cNvPr id="6" name="Rounded Rectangle 5"/>
-          <p:cNvSpPr/>
-          <p:nvPr/>
-        </p:nvSpPr>
-        <p:spPr>
-          <a:xfrm>
-            <a:off x="502920" y="5989320"/>
-            <a:ext cx="11155680" cy="566928"/>
-          </a:xfrm>
-          <a:prstGeom prst="roundRect">
-            <a:avLst/>
-          </a:prstGeom>
-          <a:solidFill>
-            <a:srgbClr val="1B212A"/>
-          </a:solidFill>
-          <a:ln w="15875">
-            <a:solidFill>
-              <a:srgbClr val="F2B137"/>
-            </a:solidFill>
-          </a:ln>
-          <a:effectLst/>
-        </p:spPr>
-        <p:style>
-          <a:lnRef idx="1">
-            <a:schemeClr val="accent1"/>
-          </a:lnRef>
-          <a:fillRef idx="3">
-            <a:schemeClr val="accent1"/>
-          </a:fillRef>
-          <a:effectRef idx="2">
-            <a:schemeClr val="accent1"/>
-          </a:effectRef>
-          <a:fontRef idx="minor">
-            <a:schemeClr val="lt1"/>
-          </a:fontRef>
-        </p:style>
-        <p:txBody>
-          <a:bodyPr rtlCol="0" anchor="ctr" wrap="square" lIns="164592" tIns="73152"/>
-          <a:lstStyle/>
-          <a:p>
-            <a:pPr algn="ctr">
-              <a:spcAft>
-                <a:spcPts val="400"/>
-              </a:spcAft>
-            </a:pPr>
-            <a:r>
-              <a:rPr sz="1200" b="1">
-                <a:solidFill>
-                  <a:srgbClr val="E8ECF1"/>
-                </a:solidFill>
-                <a:latin typeface="Calibri"/>
-              </a:rPr>
-              <a:t>A judge who asks 'what was your n?' ends a cherry-picked claim in one question. A measured miss with a route to a real answer survives the whole Q and A.</a:t>
-            </a:r>
-          </a:p>
-        </p:txBody>
-      </p:sp>
+        </p:nvGraphicFramePr>
+        <p:xfrm>
+          <a:off x="502920" y="1325880"/>
+          <a:ext cx="11155680" cy="1755648"/>
+        </p:xfrm>
+        <a:graphic>
+          <a:graphicData uri="http://schemas.openxmlformats.org/drawingml/2006/table">
+            <a:tbl>
+              <a:tblPr firstRow="1" bandRow="1">
+                <a:tableStyleId>{5C22544A-7EE6-4342-B048-85BDC9FD1C3A}</a:tableStyleId>
+              </a:tblPr>
+              <a:tblGrid>
+                <a:gridCol w="4023360"/>
+                <a:gridCol w="7132320"/>
+              </a:tblGrid>
+              <a:tr h="292608">
+                <a:tc>
+                  <a:txBody>
+                    <a:bodyPr/>
+                    <a:lstStyle/>
+                    <a:p>
+                      <a:r>
+                        <a:rPr sz="1100" b="1">
+                          <a:solidFill>
+                            <a:srgbClr val="3B9EFF"/>
+                          </a:solidFill>
+                        </a:rPr>
+                        <a:t>Question</a:t>
+                      </a:r>
+                    </a:p>
+                  </a:txBody>
+                  <a:tcPr>
+                    <a:solidFill>
+                      <a:srgbClr val="1B212A"/>
+                    </a:solidFill>
+                  </a:tcPr>
+                </a:tc>
+                <a:tc>
+                  <a:txBody>
+                    <a:bodyPr/>
+                    <a:lstStyle/>
+                    <a:p>
+                      <a:r>
+                        <a:rPr sz="1100" b="1">
+                          <a:solidFill>
+                            <a:srgbClr val="3B9EFF"/>
+                          </a:solidFill>
+                        </a:rPr>
+                        <a:t>Answer</a:t>
+                      </a:r>
+                    </a:p>
+                  </a:txBody>
+                  <a:tcPr>
+                    <a:solidFill>
+                      <a:srgbClr val="1B212A"/>
+                    </a:solidFill>
+                  </a:tcPr>
+                </a:tc>
+              </a:tr>
+              <a:tr h="292608">
+                <a:tc>
+                  <a:txBody>
+                    <a:bodyPr/>
+                    <a:lstStyle/>
+                    <a:p>
+                      <a:r>
+                        <a:rPr sz="1100">
+                          <a:solidFill>
+                            <a:srgbClr val="E8ECF1"/>
+                          </a:solidFill>
+                        </a:rPr>
+                        <a:t>Is this really decentralised, or is the server the brain?</a:t>
+                      </a:r>
+                    </a:p>
+                  </a:txBody>
+                  <a:tcPr>
+                    <a:solidFill>
+                      <a:srgbClr val="12161C"/>
+                    </a:solidFill>
+                  </a:tcPr>
+                </a:tc>
+                <a:tc>
+                  <a:txBody>
+                    <a:bodyPr/>
+                    <a:lstStyle/>
+                    <a:p>
+                      <a:r>
+                        <a:rPr sz="1100">
+                          <a:solidFill>
+                            <a:srgbClr val="E8ECF1"/>
+                          </a:solidFill>
+                        </a:rPr>
+                        <a:t>The server is a viewport. Every binding decision is made inside a robot agent from a 15 m horizon. Kill the socket and the fleet keeps coordinating.</a:t>
+                      </a:r>
+                    </a:p>
+                  </a:txBody>
+                  <a:tcPr>
+                    <a:solidFill>
+                      <a:srgbClr val="12161C"/>
+                    </a:solidFill>
+                  </a:tcPr>
+                </a:tc>
+              </a:tr>
+              <a:tr h="292608">
+                <a:tc>
+                  <a:txBody>
+                    <a:bodyPr/>
+                    <a:lstStyle/>
+                    <a:p>
+                      <a:r>
+                        <a:rPr sz="1100">
+                          <a:solidFill>
+                            <a:srgbClr val="E8ECF1"/>
+                          </a:solidFill>
+                        </a:rPr>
+                        <a:t>Where is the AI?</a:t>
+                      </a:r>
+                    </a:p>
+                  </a:txBody>
+                  <a:tcPr>
+                    <a:solidFill>
+                      <a:srgbClr val="1B212A"/>
+                    </a:solidFill>
+                  </a:tcPr>
+                </a:tc>
+                <a:tc>
+                  <a:txBody>
+                    <a:bodyPr/>
+                    <a:lstStyle/>
+                    <a:p>
+                      <a:r>
+                        <a:rPr sz="1100">
+                          <a:solidFill>
+                            <a:srgbClr val="E8ECF1"/>
+                          </a:solidFill>
+                        </a:rPr>
+                        <a:t>Advisory, and measured. It lost to persistence by 4x, so we fenced it out of the safety path and documented why. The intelligence in the safety path is the arbitration, not a model.</a:t>
+                      </a:r>
+                    </a:p>
+                  </a:txBody>
+                  <a:tcPr>
+                    <a:solidFill>
+                      <a:srgbClr val="1B212A"/>
+                    </a:solidFill>
+                  </a:tcPr>
+                </a:tc>
+              </a:tr>
+              <a:tr h="292608">
+                <a:tc>
+                  <a:txBody>
+                    <a:bodyPr/>
+                    <a:lstStyle/>
+                    <a:p>
+                      <a:r>
+                        <a:rPr sz="1100">
+                          <a:solidFill>
+                            <a:srgbClr val="E8ECF1"/>
+                          </a:solidFill>
+                        </a:rPr>
+                        <a:t>Did you hit the 20 percent target?</a:t>
+                      </a:r>
+                    </a:p>
+                  </a:txBody>
+                  <a:tcPr>
+                    <a:solidFill>
+                      <a:srgbClr val="12161C"/>
+                    </a:solidFill>
+                  </a:tcPr>
+                </a:tc>
+                <a:tc>
+                  <a:txBody>
+                    <a:bodyPr/>
+                    <a:lstStyle/>
+                    <a:p>
+                      <a:r>
+                        <a:rPr sz="1100">
+                          <a:solidFill>
+                            <a:srgbClr val="E8ECF1"/>
+                          </a:solidFill>
+                        </a:rPr>
+                        <a:t>No. +2.3 percent mean, and the measurement is under-powered at n of 1 to 16 tasks. Here is the table, and here is the run that would settle it.</a:t>
+                      </a:r>
+                    </a:p>
+                  </a:txBody>
+                  <a:tcPr>
+                    <a:solidFill>
+                      <a:srgbClr val="12161C"/>
+                    </a:solidFill>
+                  </a:tcPr>
+                </a:tc>
+              </a:tr>
+              <a:tr h="292608">
+                <a:tc>
+                  <a:txBody>
+                    <a:bodyPr/>
+                    <a:lstStyle/>
+                    <a:p>
+                      <a:r>
+                        <a:rPr sz="1100">
+                          <a:solidFill>
+                            <a:srgbClr val="E8ECF1"/>
+                          </a:solidFill>
+                        </a:rPr>
+                        <a:t>What happens when the network dies?</a:t>
+                      </a:r>
+                    </a:p>
+                  </a:txBody>
+                  <a:tcPr>
+                    <a:solidFill>
+                      <a:srgbClr val="1B212A"/>
+                    </a:solidFill>
+                  </a:tcPr>
+                </a:tc>
+                <a:tc>
+                  <a:txBody>
+                    <a:bodyPr/>
+                    <a:lstStyle/>
+                    <a:p>
+                      <a:r>
+                        <a:rPr sz="1100">
+                          <a:solidFill>
+                            <a:srgbClr val="E8ECF1"/>
+                          </a:solidFill>
+                        </a:rPr>
+                        <a:t>Sovereign mode. Speed capped at half, margin widened by 0.35 m, existing reservations only. Visible in the UI and in a KPI.</a:t>
+                      </a:r>
+                    </a:p>
+                  </a:txBody>
+                  <a:tcPr>
+                    <a:solidFill>
+                      <a:srgbClr val="1B212A"/>
+                    </a:solidFill>
+                  </a:tcPr>
+                </a:tc>
+              </a:tr>
+              <a:tr h="292608">
+                <a:tc>
+                  <a:txBody>
+                    <a:bodyPr/>
+                    <a:lstStyle/>
+                    <a:p>
+                      <a:r>
+                        <a:rPr sz="1100">
+                          <a:solidFill>
+                            <a:srgbClr val="E8ECF1"/>
+                          </a:solidFill>
+                        </a:rPr>
+                        <a:t>Would this scale to 500 robots?</a:t>
+                      </a:r>
+                    </a:p>
+                  </a:txBody>
+                  <a:tcPr>
+                    <a:solidFill>
+                      <a:srgbClr val="12161C"/>
+                    </a:solidFill>
+                  </a:tcPr>
+                </a:tc>
+                <a:tc>
+                  <a:txBody>
+                    <a:bodyPr/>
+                    <a:lstStyle/>
+                    <a:p>
+                      <a:r>
+                        <a:rPr sz="1100">
+                          <a:solidFill>
+                            <a:srgbClr val="E8ECF1"/>
+                          </a:solidFill>
+                        </a:rPr>
+                        <a:t>Message cost is O(k) in local density, tested at 8, 32 and 64 on the same pitch. Compute p95 is 10 ms of a 100 ms budget at 50. We have not run 500, so we will not claim 500.</a:t>
+                      </a:r>
+                    </a:p>
+                  </a:txBody>
+                  <a:tcPr>
+                    <a:solidFill>
+                      <a:srgbClr val="12161C"/>
+                    </a:solidFill>
+                  </a:tcPr>
+                </a:tc>
+              </a:tr>
+            </a:tbl>
+          </a:graphicData>
+        </a:graphic>
+      </p:graphicFrame>
     </p:spTree>
   </p:cSld>
   <p:clrMapOvr>
@@ -11169,6 +11208,500 @@
                 </a:solidFill>
                 <a:latin typeface="Calibri"/>
               </a:rPr>
+              <a:t>What we claim, and what we do not</a:t>
+            </a:r>
+          </a:p>
+          <a:p>
+            <a:pPr>
+              <a:spcAft>
+                <a:spcPts val="400"/>
+              </a:spcAft>
+            </a:pPr>
+            <a:r>
+              <a:rPr sz="1300" b="0">
+                <a:solidFill>
+                  <a:srgbClr val="93A1B2"/>
+                </a:solidFill>
+                <a:latin typeface="Calibri"/>
+              </a:rPr>
+              <a:t>The second list is the reason to believe the first</a:t>
+            </a:r>
+          </a:p>
+        </p:txBody>
+      </p:sp>
+      <p:sp>
+        <p:nvSpPr>
+          <p:cNvPr id="4" name="Rounded Rectangle 3"/>
+          <p:cNvSpPr/>
+          <p:nvPr/>
+        </p:nvSpPr>
+        <p:spPr>
+          <a:xfrm>
+            <a:off x="502920" y="1234440"/>
+            <a:ext cx="5394960" cy="4572000"/>
+          </a:xfrm>
+          <a:prstGeom prst="roundRect">
+            <a:avLst/>
+          </a:prstGeom>
+          <a:solidFill>
+            <a:srgbClr val="1B212A"/>
+          </a:solidFill>
+          <a:ln w="15875">
+            <a:solidFill>
+              <a:srgbClr val="35C78A"/>
+            </a:solidFill>
+          </a:ln>
+          <a:effectLst/>
+        </p:spPr>
+        <p:style>
+          <a:lnRef idx="1">
+            <a:schemeClr val="accent1"/>
+          </a:lnRef>
+          <a:fillRef idx="3">
+            <a:schemeClr val="accent1"/>
+          </a:fillRef>
+          <a:effectRef idx="2">
+            <a:schemeClr val="accent1"/>
+          </a:effectRef>
+          <a:fontRef idx="minor">
+            <a:schemeClr val="lt1"/>
+          </a:fontRef>
+        </p:style>
+        <p:txBody>
+          <a:bodyPr rtlCol="0" anchor="ctr" wrap="square" lIns="182880" tIns="128016" rIns="146304"/>
+          <a:lstStyle/>
+          <a:p>
+            <a:pPr algn="ctr">
+              <a:spcAft>
+                <a:spcPts val="800"/>
+              </a:spcAft>
+            </a:pPr>
+            <a:r>
+              <a:rPr sz="1500" b="1">
+                <a:solidFill>
+                  <a:srgbClr val="35C78A"/>
+                </a:solidFill>
+                <a:latin typeface="Calibri"/>
+              </a:rPr>
+              <a:t>We claim, and can demonstrate</a:t>
+            </a:r>
+          </a:p>
+          <a:p>
+            <a:pPr>
+              <a:spcAft>
+                <a:spcPts val="600"/>
+              </a:spcAft>
+            </a:pPr>
+            <a:r>
+              <a:rPr sz="1200" b="0">
+                <a:solidFill>
+                  <a:srgbClr val="E8ECF1"/>
+                </a:solidFill>
+                <a:latin typeface="Calibri"/>
+              </a:rPr>
+              <a:t>Zero collisions - enforced geometrically and pinned by tests.</a:t>
+            </a:r>
+          </a:p>
+          <a:p>
+            <a:pPr>
+              <a:spcAft>
+                <a:spcPts val="600"/>
+              </a:spcAft>
+            </a:pPr>
+            <a:r>
+              <a:rPr sz="1200" b="0">
+                <a:solidFill>
+                  <a:srgbClr val="E8ECF1"/>
+                </a:solidFill>
+                <a:latin typeface="Calibri"/>
+              </a:rPr>
+              <a:t>Deterministic replay from a seed, via trace hash.</a:t>
+            </a:r>
+          </a:p>
+          <a:p>
+            <a:pPr>
+              <a:spcAft>
+                <a:spcPts val="600"/>
+              </a:spcAft>
+            </a:pPr>
+            <a:r>
+              <a:rPr sz="1200" b="0">
+                <a:solidFill>
+                  <a:srgbClr val="E8ECF1"/>
+                </a:solidFill>
+                <a:latin typeface="Calibri"/>
+              </a:rPr>
+              <a:t>Simplex runtime assurance: a verifiable monitor beneath an unverifiable planner.</a:t>
+            </a:r>
+          </a:p>
+          <a:p>
+            <a:pPr>
+              <a:spcAft>
+                <a:spcPts val="600"/>
+              </a:spcAft>
+            </a:pPr>
+            <a:r>
+              <a:rPr sz="1200" b="0">
+                <a:solidFill>
+                  <a:srgbClr val="E8ECF1"/>
+                </a:solidFill>
+                <a:latin typeface="Calibri"/>
+              </a:rPr>
+              <a:t>Adversarial robot detection, quarantine and route-around.</a:t>
+            </a:r>
+          </a:p>
+          <a:p>
+            <a:pPr>
+              <a:spcAft>
+                <a:spcPts val="600"/>
+              </a:spcAft>
+            </a:pPr>
+            <a:r>
+              <a:rPr sz="1200" b="0">
+                <a:solidFill>
+                  <a:srgbClr val="E8ECF1"/>
+                </a:solidFill>
+                <a:latin typeface="Calibri"/>
+              </a:rPr>
+              <a:t>Sovereign operation after total radio loss, under a stated envelope.</a:t>
+            </a:r>
+          </a:p>
+          <a:p>
+            <a:pPr>
+              <a:spcAft>
+                <a:spcPts val="600"/>
+              </a:spcAft>
+            </a:pPr>
+            <a:r>
+              <a:rPr sz="1200" b="0">
+                <a:solidFill>
+                  <a:srgbClr val="E8ECF1"/>
+                </a:solidFill>
+                <a:latin typeface="Calibri"/>
+              </a:rPr>
+              <a:t>O(k) message cost in local density, not fleet size.</a:t>
+            </a:r>
+          </a:p>
+          <a:p>
+            <a:pPr>
+              <a:spcAft>
+                <a:spcPts val="600"/>
+              </a:spcAft>
+            </a:pPr>
+            <a:r>
+              <a:rPr sz="1200" b="0">
+                <a:solidFill>
+                  <a:srgbClr val="E8ECF1"/>
+                </a:solidFill>
+                <a:latin typeface="Calibri"/>
+              </a:rPr>
+              <a:t>10 ms p95 tick compute against a 100 ms budget at fleet 50.</a:t>
+            </a:r>
+          </a:p>
+        </p:txBody>
+      </p:sp>
+      <p:sp>
+        <p:nvSpPr>
+          <p:cNvPr id="5" name="Rounded Rectangle 4"/>
+          <p:cNvSpPr/>
+          <p:nvPr/>
+        </p:nvSpPr>
+        <p:spPr>
+          <a:xfrm>
+            <a:off x="6263640" y="1234440"/>
+            <a:ext cx="5394960" cy="4572000"/>
+          </a:xfrm>
+          <a:prstGeom prst="roundRect">
+            <a:avLst/>
+          </a:prstGeom>
+          <a:solidFill>
+            <a:srgbClr val="1B212A"/>
+          </a:solidFill>
+          <a:ln w="15875">
+            <a:solidFill>
+              <a:srgbClr val="E55B5B"/>
+            </a:solidFill>
+          </a:ln>
+          <a:effectLst/>
+        </p:spPr>
+        <p:style>
+          <a:lnRef idx="1">
+            <a:schemeClr val="accent1"/>
+          </a:lnRef>
+          <a:fillRef idx="3">
+            <a:schemeClr val="accent1"/>
+          </a:fillRef>
+          <a:effectRef idx="2">
+            <a:schemeClr val="accent1"/>
+          </a:effectRef>
+          <a:fontRef idx="minor">
+            <a:schemeClr val="lt1"/>
+          </a:fontRef>
+        </p:style>
+        <p:txBody>
+          <a:bodyPr rtlCol="0" anchor="ctr" wrap="square" lIns="182880" tIns="128016" rIns="146304"/>
+          <a:lstStyle/>
+          <a:p>
+            <a:pPr algn="ctr">
+              <a:spcAft>
+                <a:spcPts val="800"/>
+              </a:spcAft>
+            </a:pPr>
+            <a:r>
+              <a:rPr sz="1500" b="1">
+                <a:solidFill>
+                  <a:srgbClr val="E55B5B"/>
+                </a:solidFill>
+                <a:latin typeface="Calibri"/>
+              </a:rPr>
+              <a:t>We do not claim</a:t>
+            </a:r>
+          </a:p>
+          <a:p>
+            <a:pPr>
+              <a:spcAft>
+                <a:spcPts val="600"/>
+              </a:spcAft>
+            </a:pPr>
+            <a:r>
+              <a:rPr sz="1200" b="0">
+                <a:solidFill>
+                  <a:srgbClr val="E8ECF1"/>
+                </a:solidFill>
+                <a:latin typeface="Calibri"/>
+              </a:rPr>
+              <a:t>The 20 percent completion-time reduction. Measured at +2.3 percent, under-powered, and not yet answered.</a:t>
+            </a:r>
+          </a:p>
+          <a:p>
+            <a:pPr>
+              <a:spcAft>
+                <a:spcPts val="600"/>
+              </a:spcAft>
+            </a:pPr>
+            <a:r>
+              <a:rPr sz="1200" b="0">
+                <a:solidFill>
+                  <a:srgbClr val="E8ECF1"/>
+                </a:solidFill>
+                <a:latin typeface="Calibri"/>
+              </a:rPr>
+              <a:t>That our forecaster is good. It is worse than persistence and we published the number.</a:t>
+            </a:r>
+          </a:p>
+          <a:p>
+            <a:pPr>
+              <a:spcAft>
+                <a:spcPts val="600"/>
+              </a:spcAft>
+            </a:pPr>
+            <a:r>
+              <a:rPr sz="1200" b="0">
+                <a:solidFill>
+                  <a:srgbClr val="E8ECF1"/>
+                </a:solidFill>
+                <a:latin typeface="Calibri"/>
+              </a:rPr>
+              <a:t>Operation at 500 robots. Untested, therefore unclaimed.</a:t>
+            </a:r>
+          </a:p>
+          <a:p>
+            <a:pPr>
+              <a:spcAft>
+                <a:spcPts val="600"/>
+              </a:spcAft>
+            </a:pPr>
+            <a:r>
+              <a:rPr sz="1200" b="0">
+                <a:solidFill>
+                  <a:srgbClr val="E8ECF1"/>
+                </a:solidFill>
+                <a:latin typeface="Calibri"/>
+              </a:rPr>
+              <a:t>Hardware validation. This is a simulation-backed software stack, and the physics is deliberately simple.</a:t>
+            </a:r>
+          </a:p>
+          <a:p>
+            <a:pPr>
+              <a:spcAft>
+                <a:spcPts val="600"/>
+              </a:spcAft>
+            </a:pPr>
+            <a:r>
+              <a:rPr sz="1200" b="0">
+                <a:solidFill>
+                  <a:srgbClr val="E8ECF1"/>
+                </a:solidFill>
+                <a:latin typeface="Calibri"/>
+              </a:rPr>
+              <a:t>Novelty for N1, N2, N4 and N6 - those are competent engineering, not contributions.</a:t>
+            </a:r>
+          </a:p>
+        </p:txBody>
+      </p:sp>
+      <p:sp>
+        <p:nvSpPr>
+          <p:cNvPr id="6" name="Rounded Rectangle 5"/>
+          <p:cNvSpPr/>
+          <p:nvPr/>
+        </p:nvSpPr>
+        <p:spPr>
+          <a:xfrm>
+            <a:off x="502920" y="5989320"/>
+            <a:ext cx="11155680" cy="566928"/>
+          </a:xfrm>
+          <a:prstGeom prst="roundRect">
+            <a:avLst/>
+          </a:prstGeom>
+          <a:solidFill>
+            <a:srgbClr val="1B212A"/>
+          </a:solidFill>
+          <a:ln w="15875">
+            <a:solidFill>
+              <a:srgbClr val="F2B137"/>
+            </a:solidFill>
+          </a:ln>
+          <a:effectLst/>
+        </p:spPr>
+        <p:style>
+          <a:lnRef idx="1">
+            <a:schemeClr val="accent1"/>
+          </a:lnRef>
+          <a:fillRef idx="3">
+            <a:schemeClr val="accent1"/>
+          </a:fillRef>
+          <a:effectRef idx="2">
+            <a:schemeClr val="accent1"/>
+          </a:effectRef>
+          <a:fontRef idx="minor">
+            <a:schemeClr val="lt1"/>
+          </a:fontRef>
+        </p:style>
+        <p:txBody>
+          <a:bodyPr rtlCol="0" anchor="ctr" wrap="square" lIns="164592" tIns="73152"/>
+          <a:lstStyle/>
+          <a:p>
+            <a:pPr algn="ctr">
+              <a:spcAft>
+                <a:spcPts val="400"/>
+              </a:spcAft>
+            </a:pPr>
+            <a:r>
+              <a:rPr sz="1200" b="1">
+                <a:solidFill>
+                  <a:srgbClr val="E8ECF1"/>
+                </a:solidFill>
+                <a:latin typeface="Calibri"/>
+              </a:rPr>
+              <a:t>A judge who asks 'what was your n?' ends a cherry-picked claim in one question. A measured miss with a route to a real answer survives the whole Q and A.</a:t>
+            </a:r>
+          </a:p>
+        </p:txBody>
+      </p:sp>
+    </p:spTree>
+  </p:cSld>
+  <p:clrMapOvr>
+    <a:masterClrMapping/>
+  </p:clrMapOvr>
+</p:sld>
+</file>
+
+<file path=ppt/slides/slide24.xml><?xml version="1.0" encoding="utf-8"?>
+<p:sld xmlns:a="http://schemas.openxmlformats.org/drawingml/2006/main" xmlns:p="http://schemas.openxmlformats.org/presentationml/2006/main" xmlns:r="http://schemas.openxmlformats.org/officeDocument/2006/relationships">
+  <p:cSld>
+    <p:bg>
+      <p:bgPr>
+        <a:solidFill>
+          <a:srgbClr val="12161C"/>
+        </a:solidFill>
+        <a:effectLst/>
+      </p:bgPr>
+    </p:bg>
+    <p:spTree>
+      <p:nvGrpSpPr>
+        <p:cNvPr id="1" name=""/>
+        <p:cNvGrpSpPr/>
+        <p:nvPr/>
+      </p:nvGrpSpPr>
+      <p:grpSpPr/>
+      <p:sp>
+        <p:nvSpPr>
+          <p:cNvPr id="2" name="Rectangle 1"/>
+          <p:cNvSpPr/>
+          <p:nvPr/>
+        </p:nvSpPr>
+        <p:spPr>
+          <a:xfrm>
+            <a:off x="0" y="0"/>
+            <a:ext cx="82296" cy="6858000"/>
+          </a:xfrm>
+          <a:prstGeom prst="rect">
+            <a:avLst/>
+          </a:prstGeom>
+          <a:solidFill>
+            <a:srgbClr val="3B9EFF"/>
+          </a:solidFill>
+          <a:ln>
+            <a:noFill/>
+          </a:ln>
+          <a:effectLst/>
+        </p:spPr>
+        <p:style>
+          <a:lnRef idx="1">
+            <a:schemeClr val="accent1"/>
+          </a:lnRef>
+          <a:fillRef idx="3">
+            <a:schemeClr val="accent1"/>
+          </a:fillRef>
+          <a:effectRef idx="2">
+            <a:schemeClr val="accent1"/>
+          </a:effectRef>
+          <a:fontRef idx="minor">
+            <a:schemeClr val="lt1"/>
+          </a:fontRef>
+        </p:style>
+        <p:txBody>
+          <a:bodyPr rtlCol="0" anchor="ctr"/>
+          <a:lstStyle/>
+          <a:p>
+            <a:pPr algn="ctr"/>
+          </a:p>
+        </p:txBody>
+      </p:sp>
+      <p:sp>
+        <p:nvSpPr>
+          <p:cNvPr id="3" name="TextBox 2"/>
+          <p:cNvSpPr txBox="1"/>
+          <p:nvPr/>
+        </p:nvSpPr>
+        <p:spPr>
+          <a:xfrm>
+            <a:off x="411480" y="256032"/>
+            <a:ext cx="11338560" cy="822960"/>
+          </a:xfrm>
+          <a:prstGeom prst="rect">
+            <a:avLst/>
+          </a:prstGeom>
+          <a:noFill/>
+        </p:spPr>
+        <p:txBody>
+          <a:bodyPr wrap="square">
+            <a:spAutoFit/>
+          </a:bodyPr>
+          <a:lstStyle/>
+          <a:p>
+            <a:pPr>
+              <a:spcAft>
+                <a:spcPts val="200"/>
+              </a:spcAft>
+            </a:pPr>
+            <a:r>
+              <a:rPr sz="2800" b="1">
+                <a:solidFill>
+                  <a:srgbClr val="E8ECF1"/>
+                </a:solidFill>
+                <a:latin typeface="Calibri"/>
+              </a:rPr>
               <a:t>What comes next</a:t>
             </a:r>
           </a:p>
@@ -11302,7 +11835,7 @@
                             <a:srgbClr val="E8ECF1"/>
                           </a:solidFill>
                         </a:rPr>
-                        <a:t>Power the C2 measurement</a:t>
+                        <a:t>Re-score C2 on a sound statistic</a:t>
                       </a:r>
                     </a:p>
                   </a:txBody>
@@ -11323,7 +11856,7 @@
                             <a:srgbClr val="E8ECF1"/>
                           </a:solidFill>
                         </a:rPr>
-                        <a:t>18000 ticks, 15 to 20 seeds, confidence interval. A few CPU-minutes. Either it clears 20 percent or we know it does not.</a:t>
+                        <a:t>Equal-completion-count time and tasks_per_min, both immune to the survivorship bias in avg_completion_s. No new simulation needed - the paired runs are already on disk.</a:t>
                       </a:r>
                     </a:p>
                   </a:txBody>
@@ -11367,7 +11900,7 @@
                             <a:srgbClr val="E8ECF1"/>
                           </a:solidFill>
                         </a:rPr>
-                        <a:t>Check whether task supply is the binding constraint</a:t>
+                        <a:t>Raise task supply until neither arm is idle-limited</a:t>
                       </a:r>
                     </a:p>
                   </a:txBody>
@@ -11388,7 +11921,7 @@
                             <a:srgbClr val="E8ECF1"/>
                           </a:solidFill>
                         </a:rPr>
-                        <a:t>If both arms are idle-limited, no coordination policy can move the number and the scenario is the thing to fix.</a:t>
+                        <a:t>Measured: blocked_aisle is exhausted well before 1800 ticks, so longer runs cannot power C2. Until supply binds, no coordination policy can move the number and the scenario is the thing to fix.</a:t>
                       </a:r>
                     </a:p>
                   </a:txBody>
@@ -11587,7 +12120,7 @@
                 </a:solidFill>
                 <a:latin typeface="Calibri"/>
               </a:rPr>
-              <a:t>Item 4 is cheap precisely because of law L1 - one authoritative state source means the world model is replaceable.</a:t>
+              <a:t>The two items that used to head this list - longer runs, and checking whether task supply binds - are now answered, and the answer killed the first one. Item 4 is cheap precisely because of law L1: one authoritative state source means the world model is replaceable.</a:t>
             </a:r>
           </a:p>
         </p:txBody>
@@ -11600,7 +12133,7 @@
 </p:sld>
 </file>
 
-<file path=ppt/slides/slide24.xml><?xml version="1.0" encoding="utf-8"?>
+<file path=ppt/slides/slide25.xml><?xml version="1.0" encoding="utf-8"?>
 <p:sld xmlns:a="http://schemas.openxmlformats.org/drawingml/2006/main" xmlns:p="http://schemas.openxmlformats.org/presentationml/2006/main" xmlns:r="http://schemas.openxmlformats.org/officeDocument/2006/relationships">
   <p:cSld>
     <p:bg>

--- a/SWARMOS_Master_Specification_SIH26123.pptx
+++ b/SWARMOS_Master_Specification_SIH26123.pptx
@@ -7960,7 +7960,7 @@
                 </a:solidFill>
                 <a:latin typeface="Calibri"/>
               </a:rPr>
-              <a:t>C1 is met after we found and fixed two real defects. C2 is not met, and we say so.</a:t>
+              <a:t>C1 met after two real defects were fixed. C2 met for the product default in a frozen simulation benchmark (v3) - mostly reliability.</a:t>
             </a:r>
           </a:p>
         </p:txBody>
@@ -7984,7 +7984,7 @@
           </a:solidFill>
           <a:ln w="15875">
             <a:solidFill>
-              <a:srgbClr val="3B9EFF"/>
+              <a:srgbClr val="35C78A"/>
             </a:solidFill>
           </a:ln>
           <a:effectLst/>
@@ -8015,11 +8015,11 @@
             <a:r>
               <a:rPr sz="3000" b="1">
                 <a:solidFill>
-                  <a:srgbClr val="3B9EFF"/>
-                </a:solidFill>
-                <a:latin typeface="Calibri"/>
-              </a:rPr>
-              <a:t>9000</a:t>
+                  <a:srgbClr val="35C78A"/>
+                </a:solidFill>
+                <a:latin typeface="Calibri"/>
+              </a:rPr>
+              <a:t>+48.9 pct</a:t>
             </a:r>
           </a:p>
           <a:p>
@@ -8035,7 +8035,7 @@
                 </a:solidFill>
                 <a:latin typeface="Calibri"/>
               </a:rPr>
-              <a:t>ticks per run, 27 paired</a:t>
+              <a:t>C2 v3, CI [+35.3, +62.5], sim</a:t>
             </a:r>
           </a:p>
         </p:txBody>
@@ -8094,7 +8094,7 @@
                 </a:solidFill>
                 <a:latin typeface="Calibri"/>
               </a:rPr>
-              <a:t>7 -&gt; 0</a:t>
+              <a:t>40/40 vs 21/40</a:t>
             </a:r>
           </a:p>
           <a:p>
@@ -8110,7 +8110,7 @@
                 </a:solidFill>
                 <a:latin typeface="Calibri"/>
               </a:rPr>
-              <a:t>SwarmOS collisions</a:t>
+              <a:t>batches finished (overlap)</a:t>
             </a:r>
           </a:p>
         </p:txBody>
@@ -8134,7 +8134,7 @@
           </a:solidFill>
           <a:ln w="15875">
             <a:solidFill>
-              <a:srgbClr val="E55B5B"/>
+              <a:srgbClr val="F2B137"/>
             </a:solidFill>
           </a:ln>
           <a:effectLst/>
@@ -8165,11 +8165,11 @@
             <a:r>
               <a:rPr sz="3000" b="1">
                 <a:solidFill>
-                  <a:srgbClr val="E55B5B"/>
-                </a:solidFill>
-                <a:latin typeface="Calibri"/>
-              </a:rPr>
-              <a:t>-19.3 pct</a:t>
+                  <a:srgbClr val="F2B137"/>
+                </a:solidFill>
+                <a:latin typeface="Calibri"/>
+              </a:rPr>
+              <a:t>+17.5 pct</a:t>
             </a:r>
           </a:p>
           <a:p>
@@ -8185,7 +8185,7 @@
                 </a:solidFill>
                 <a:latin typeface="Calibri"/>
               </a:rPr>
-              <a:t>C2 mean, sign negative</a:t>
+              <a:t>both-finished speed, CI [+1.4, +33.6]</a:t>
             </a:r>
           </a:p>
         </p:txBody>
@@ -8209,7 +8209,7 @@
           </a:solidFill>
           <a:ln w="15875">
             <a:solidFill>
-              <a:srgbClr val="E55B5B"/>
+              <a:srgbClr val="35C78A"/>
             </a:solidFill>
           </a:ln>
           <a:effectLst/>
@@ -8240,11 +8240,11 @@
             <a:r>
               <a:rPr sz="3000" b="1">
                 <a:solidFill>
-                  <a:srgbClr val="E55B5B"/>
-                </a:solidFill>
-                <a:latin typeface="Calibri"/>
-              </a:rPr>
-              <a:t>20 pct</a:t>
+                  <a:srgbClr val="35C78A"/>
+                </a:solidFill>
+                <a:latin typeface="Calibri"/>
+              </a:rPr>
+              <a:t>0</a:t>
             </a:r>
           </a:p>
           <a:p>
@@ -8260,7 +8260,7 @@
                 </a:solidFill>
                 <a:latin typeface="Calibri"/>
               </a:rPr>
-              <a:t>C2 bar - not met</a:t>
+              <a:t>collisions, 240 runs</a:t>
             </a:r>
           </a:p>
         </p:txBody>
@@ -8331,7 +8331,7 @@
                 </a:solidFill>
                 <a:latin typeface="Calibri"/>
               </a:rPr>
-              <a:t>C2: NOT MET. Mean -19.3 percent, 95 percent CI [-36.0, -2.6]. It got worse when we fixed defect 2, which is the right direction: a sound step bound withholds speed the arbiter used to grant.</a:t>
+              <a:t>C2 (current): frozen protocol v3, product default (F1+F3+F5+F6, F2 off, 0.75 m floor) vs textbook stop-and-wait + F1 + F6 on overlap_batch, 40 fresh seeds: +48.9 percent, 95 percent CI [+35.3, +62.5]; 40/40 vs 21/40 finished; all five frozen conditions passed; 240/240 replayed exactly. Simulation only.</a:t>
             </a:r>
           </a:p>
           <a:p>
@@ -8347,7 +8347,7 @@
                 </a:solidFill>
                 <a:latin typeface="Calibri"/>
               </a:rPr>
-              <a:t>Two findings matter more than that number. Task supply, not run length, binds - 9000 ticks of blocked_aisle is byte-identical to 1800. And avg_completion_s across arms is survivorship-biased: one seed scored +25.9 percent for us only because we finished 3 tasks to the baseline's 12.</a:t>
+              <a:t>Caveats we state first: where both finish, +17.5 percent [+1.4, +33.6] - below 20 percent on speed alone. Open floor: capped +33.7 percent [+4.5, +62.8], 40/40 vs 15/40, but SWARMOS is slower when both finish. History: the earlier avg_completion_s result (-19.3 percent, NOT MET) is superseded.</a:t>
             </a:r>
           </a:p>
         </p:txBody>
@@ -8406,7 +8406,7 @@
                 </a:solidFill>
                 <a:latin typeface="Calibri"/>
               </a:rPr>
-              <a:t>Full record in docs/SUCCESS_CRITERIA_VERIFICATION.md, raw log in reports/criteria_after_envelope_fix.log. Reproduce with tools/verify_criteria_powered.py 9000 9.</a:t>
+              <a:t>C2: docs/C2_V3_PRODUCT_RESULT.md, reports/c2v3/. C1 history: docs/SUCCESS_CRITERIA_VERIFICATION.md, reports/criteria_after_envelope_fix.log.</a:t>
             </a:r>
           </a:p>
         </p:txBody>
@@ -8546,7 +8546,7 @@
         </p:nvGraphicFramePr>
         <p:xfrm>
           <a:off x="502920" y="1371600"/>
-          <a:ext cx="11155680" cy="877824"/>
+          <a:ext cx="11155677" cy="877824"/>
         </p:xfrm>
         <a:graphic>
           <a:graphicData uri="http://schemas.openxmlformats.org/drawingml/2006/table">
@@ -8555,10 +8555,10 @@
                 <a:tableStyleId>{5C22544A-7EE6-4342-B048-85BDC9FD1C3A}</a:tableStyleId>
               </a:tblPr>
               <a:tblGrid>
-                <a:gridCol w="457200"/>
-                <a:gridCol w="2103120"/>
+                <a:gridCol w="457199"/>
+                <a:gridCol w="2103119"/>
                 <a:gridCol w="5029200"/>
-                <a:gridCol w="3566160"/>
+                <a:gridCol w="3566159"/>
               </a:tblGrid>
               <a:tr h="292608">
                 <a:tc>
@@ -11001,7 +11001,7 @@
                             <a:srgbClr val="E8ECF1"/>
                           </a:solidFill>
                         </a:rPr>
-                        <a:t>No. +2.3 percent mean, and the measurement is under-powered at n of 1 to 16 tasks. Here is the table, and here is the run that would settle it.</a:t>
+                        <a:t>In a frozen simulation benchmark, for the product default on the overlapping-paths floor: +48.9 percent, 95 percent CI [+35.3, +62.5], 40/40 vs 21/40 batches finished. Mostly reliability: where both finish it is +17.5 percent [+1.4, +33.6], and the open floor is slower when both finish.</a:t>
                       </a:r>
                     </a:p>
                   </a:txBody>
@@ -11470,7 +11470,23 @@
                 </a:solidFill>
                 <a:latin typeface="Calibri"/>
               </a:rPr>
-              <a:t>The 20 percent completion-time reduction. Measured at +2.3 percent, under-powered, and not yet answered.</a:t>
+              <a:t>That SWARMOS is universally faster. C2 (+48.9 percent, simulation) is mostly reliability; where both finish it is +17.5 percent, and slower on the open floor.</a:t>
+            </a:r>
+          </a:p>
+          <a:p>
+            <a:pPr>
+              <a:spcAft>
+                <a:spcPts val="600"/>
+              </a:spcAft>
+            </a:pPr>
+            <a:r>
+              <a:rPr sz="1200" b="0">
+                <a:solidFill>
+                  <a:srgbClr val="E8ECF1"/>
+                </a:solidFill>
+                <a:latin typeface="Calibri"/>
+              </a:rPr>
+              <a:t>Physical-world certification. Every C2 number is simulation.</a:t>
             </a:r>
           </a:p>
           <a:p>
@@ -13311,7 +13327,7 @@
         </p:nvGraphicFramePr>
         <p:xfrm>
           <a:off x="502920" y="1371600"/>
-          <a:ext cx="11155679" cy="1463040"/>
+          <a:ext cx="11155680" cy="1463040"/>
         </p:xfrm>
         <a:graphic>
           <a:graphicData uri="http://schemas.openxmlformats.org/drawingml/2006/table">
@@ -13322,7 +13338,7 @@
               <a:tblGrid>
                 <a:gridCol w="548640"/>
                 <a:gridCol w="4023360"/>
-                <a:gridCol w="6583679"/>
+                <a:gridCol w="6583680"/>
               </a:tblGrid>
               <a:tr h="292608">
                 <a:tc>
